--- a/docs/slides.pptx
+++ b/docs/slides.pptx
@@ -21,6 +21,7 @@
     <p:sldId id="269" r:id="rId15"/>
     <p:sldId id="270" r:id="rId16"/>
     <p:sldId id="271" r:id="rId17"/>
+    <p:sldId id="272" r:id="rId18"/>
   </p:sldIdLst>
   <p:sldSz cx="9144000" cy="5143500" type="screen16x9"/>
   <p:notesSz cx="6858000" cy="9144000"/>
@@ -3158,6 +3159,8 @@
             <a:pPr lvl="0" indent="0" marL="0">
               <a:buNone/>
             </a:pPr>
+            <a:br/>
+            <a:br/>
             <a:r>
               <a:rPr/>
               <a:t>Max Buettenback</a:t>
@@ -3207,7 +3210,7 @@
             </a:pPr>
             <a:r>
               <a:rPr/>
-              <a:t>Consequences of Failure</a:t>
+              <a:t>Probability of Failure</a:t>
             </a:r>
           </a:p>
         </p:txBody>
@@ -3230,23 +3233,28 @@
             <a:pPr lvl="0"/>
             <a:r>
               <a:rPr/>
-              <a:t>Traffic varies across bridges</a:t>
+              <a:t>Lower condition rating = higher risk</a:t>
             </a:r>
           </a:p>
           <a:p>
             <a:pPr lvl="0"/>
             <a:r>
               <a:rPr/>
-              <a:t>Some carry over 100,000 vehicles/day</a:t>
-            </a:r>
-          </a:p>
-          <a:p>
-            <a:pPr lvl="0" indent="0" marL="0">
-              <a:buNone/>
-            </a:pPr>
-            <a:r>
-              <a:rPr b="1"/>
-              <a:t>High traffic = bigger impact</a:t>
+              <a:t>Older bridges tend to have lower ratings</a:t>
+            </a:r>
+          </a:p>
+          <a:p>
+            <a:pPr lvl="0"/>
+            <a:r>
+              <a:rPr/>
+              <a:t>Shows deterioration over time</a:t>
+            </a:r>
+          </a:p>
+          <a:p>
+            <a:pPr lvl="0"/>
+            <a:r>
+              <a:rPr/>
+              <a:t>Most bridges are still in acceptable condition</a:t>
             </a:r>
           </a:p>
         </p:txBody>
@@ -3293,7 +3301,7 @@
             </a:pPr>
             <a:r>
               <a:rPr/>
-              <a:t>Highest Risk Bridges</a:t>
+              <a:t>Consequences of Failure</a:t>
             </a:r>
           </a:p>
         </p:txBody>
@@ -3316,14 +3324,14 @@
             <a:pPr lvl="0"/>
             <a:r>
               <a:rPr/>
-              <a:t>Low condition rating (≤ 4)</a:t>
+              <a:t>Traffic varies across bridges</a:t>
             </a:r>
           </a:p>
           <a:p>
             <a:pPr lvl="0"/>
             <a:r>
               <a:rPr/>
-              <a:t>High traffic volume</a:t>
+              <a:t>Some carry over 100,000 vehicles/day</a:t>
             </a:r>
           </a:p>
           <a:p>
@@ -3331,8 +3339,8 @@
               <a:buNone/>
             </a:pPr>
             <a:r>
-              <a:rPr/>
-              <a:t>→ Typically major routes (I-80, etc.)</a:t>
+              <a:rPr b="1"/>
+              <a:t>High traffic = bigger impact</a:t>
             </a:r>
           </a:p>
         </p:txBody>
@@ -3379,7 +3387,7 @@
             </a:pPr>
             <a:r>
               <a:rPr/>
-              <a:t>Key Findings</a:t>
+              <a:t>Highest Risk Bridges</a:t>
             </a:r>
           </a:p>
         </p:txBody>
@@ -3402,28 +3410,23 @@
             <a:pPr lvl="0"/>
             <a:r>
               <a:rPr/>
-              <a:t>Most bridges are in good condition</a:t>
+              <a:t>Low condition rating (≤ 4)</a:t>
             </a:r>
           </a:p>
           <a:p>
             <a:pPr lvl="0"/>
             <a:r>
               <a:rPr/>
-              <a:t>Only 16 / 511 (~3%) are poor</a:t>
-            </a:r>
-          </a:p>
-          <a:p>
-            <a:pPr lvl="0"/>
-            <a:r>
-              <a:rPr/>
-              <a:t>Older bridges show more wear</a:t>
-            </a:r>
-          </a:p>
-          <a:p>
-            <a:pPr lvl="0"/>
-            <a:r>
-              <a:rPr/>
-              <a:t>High traffic = biggest impact</a:t>
+              <a:t>High traffic volume</a:t>
+            </a:r>
+          </a:p>
+          <a:p>
+            <a:pPr lvl="0" indent="0" marL="0">
+              <a:buNone/>
+            </a:pPr>
+            <a:r>
+              <a:rPr/>
+              <a:t>→ Typically major routes (I-80, etc.)</a:t>
             </a:r>
           </a:p>
         </p:txBody>
@@ -3470,7 +3473,2439 @@
             </a:pPr>
             <a:r>
               <a:rPr/>
+              <a:t>Key Findings</a:t>
+            </a:r>
+          </a:p>
+        </p:txBody>
+      </p:sp>
+      <p:sp>
+        <p:nvSpPr>
+          <p:cNvPr id="3" name="Content Placeholder 2"/>
+          <p:cNvSpPr>
+            <a:spLocks noGrp="1"/>
+          </p:cNvSpPr>
+          <p:nvPr>
+            <p:ph idx="1"/>
+          </p:nvPr>
+        </p:nvSpPr>
+        <p:spPr/>
+        <p:txBody>
+          <a:bodyPr/>
+          <a:lstStyle/>
+          <a:p>
+            <a:pPr lvl="0"/>
+            <a:r>
+              <a:rPr/>
+              <a:t>Most bridges are in good condition</a:t>
+            </a:r>
+          </a:p>
+          <a:p>
+            <a:pPr lvl="0"/>
+            <a:r>
+              <a:rPr/>
+              <a:t>Only 16 / 511 (~3%) are poor</a:t>
+            </a:r>
+          </a:p>
+          <a:p>
+            <a:pPr lvl="0"/>
+            <a:r>
+              <a:rPr/>
+              <a:t>Older bridges show more wear</a:t>
+            </a:r>
+          </a:p>
+          <a:p>
+            <a:pPr lvl="0"/>
+            <a:r>
+              <a:rPr/>
+              <a:t>High traffic = biggest impact</a:t>
+            </a:r>
+          </a:p>
+        </p:txBody>
+      </p:sp>
+    </p:spTree>
+  </p:cSld>
+</p:sld>
+</file>
+
+<file path=ppt/slides/slide14.xml><?xml version="1.0" encoding="utf-8"?>
+<p:sld xmlns:a="http://schemas.openxmlformats.org/drawingml/2006/main" xmlns:r="http://schemas.openxmlformats.org/officeDocument/2006/relationships" xmlns:p="http://schemas.openxmlformats.org/presentationml/2006/main">
+  <p:cSld>
+    <p:spTree>
+      <p:nvGrpSpPr>
+        <p:cNvPr id="1" name=""/>
+        <p:cNvGrpSpPr/>
+        <p:nvPr/>
+      </p:nvGrpSpPr>
+      <p:grpSpPr>
+        <a:xfrm>
+          <a:off x="0" y="0"/>
+          <a:ext cx="0" cy="0"/>
+          <a:chOff x="0" y="0"/>
+          <a:chExt cx="0" cy="0"/>
+        </a:xfrm>
+      </p:grpSpPr>
+      <p:sp>
+        <p:nvSpPr>
+          <p:cNvPr id="2" name="Title 1"/>
+          <p:cNvSpPr>
+            <a:spLocks noGrp="1"/>
+          </p:cNvSpPr>
+          <p:nvPr>
+            <p:ph type="title"/>
+          </p:nvPr>
+        </p:nvSpPr>
+        <p:spPr/>
+        <p:txBody>
+          <a:bodyPr/>
+          <a:lstStyle/>
+          <a:p>
+            <a:pPr lvl="0" indent="0" marL="0">
+              <a:buNone/>
+            </a:pPr>
+            <a:r>
+              <a:rPr/>
               <a:t>Bridge Condition Summary</a:t>
+            </a:r>
+          </a:p>
+        </p:txBody>
+      </p:sp>
+      <p:pic>
+        <p:nvPicPr>
+          <p:cNvPr descr="slides_files/figure-pptx/unnamed-chunk-4-1.png" id="0" name="Picture 1"/>
+          <p:cNvPicPr>
+            <a:picLocks noGrp="1" noChangeAspect="1"/>
+          </p:cNvPicPr>
+          <p:nvPr/>
+        </p:nvPicPr>
+        <p:blipFill>
+          <a:blip r:embed="rId2"/>
+          <a:stretch>
+            <a:fillRect/>
+          </a:stretch>
+        </p:blipFill>
+        <p:spPr bwMode="auto">
+          <a:xfrm>
+            <a:off x="1689100" y="1193800"/>
+            <a:ext cx="5765800" cy="2882900"/>
+          </a:xfrm>
+          <a:prstGeom prst="rect">
+            <a:avLst/>
+          </a:prstGeom>
+          <a:noFill/>
+          <a:ln w="9525">
+            <a:noFill/>
+            <a:headEnd/>
+            <a:tailEnd/>
+          </a:ln>
+        </p:spPr>
+      </p:pic>
+      <p:sp>
+        <p:nvSpPr>
+          <p:cNvPr id="1" name="TextBox 3"/>
+          <p:cNvSpPr txBox="1"/>
+          <p:nvPr/>
+        </p:nvSpPr>
+        <p:spPr>
+          <a:xfrm>
+            <a:off x="457200" y="4076700"/>
+            <a:ext cx="8229600" cy="508000"/>
+          </a:xfrm>
+          <a:prstGeom prst="rect">
+            <a:avLst/>
+          </a:prstGeom>
+          <a:noFill/>
+        </p:spPr>
+        <p:txBody>
+          <a:bodyPr/>
+          <a:lstStyle/>
+          <a:p>
+            <a:pPr lvl="0" indent="0" marL="0" algn="ctr">
+              <a:buNone/>
+            </a:pPr>
+            <a:r>
+              <a:rPr/>
+              <a:t>Number of bridges in poor vs acceptable condition</a:t>
+            </a:r>
+          </a:p>
+        </p:txBody>
+      </p:sp>
+    </p:spTree>
+  </p:cSld>
+</p:sld>
+</file>
+
+<file path=ppt/slides/slide15.xml><?xml version="1.0" encoding="utf-8"?>
+<p:sld xmlns:a="http://schemas.openxmlformats.org/drawingml/2006/main" xmlns:r="http://schemas.openxmlformats.org/officeDocument/2006/relationships" xmlns:p="http://schemas.openxmlformats.org/presentationml/2006/main">
+  <p:cSld>
+    <p:spTree>
+      <p:nvGrpSpPr>
+        <p:cNvPr id="1" name=""/>
+        <p:cNvGrpSpPr/>
+        <p:nvPr/>
+      </p:nvGrpSpPr>
+      <p:grpSpPr>
+        <a:xfrm>
+          <a:off x="0" y="0"/>
+          <a:ext cx="0" cy="0"/>
+          <a:chOff x="0" y="0"/>
+          <a:chExt cx="0" cy="0"/>
+        </a:xfrm>
+      </p:grpSpPr>
+      <p:sp>
+        <p:nvSpPr>
+          <p:cNvPr id="2" name="Title 1"/>
+          <p:cNvSpPr>
+            <a:spLocks noGrp="1"/>
+          </p:cNvSpPr>
+          <p:nvPr>
+            <p:ph type="title"/>
+          </p:nvPr>
+        </p:nvSpPr>
+        <p:spPr/>
+        <p:txBody>
+          <a:bodyPr/>
+          <a:lstStyle/>
+          <a:p>
+            <a:pPr lvl="0" indent="0" marL="0">
+              <a:buNone/>
+            </a:pPr>
+            <a:r>
+              <a:rPr/>
+              <a:t>Recommendations</a:t>
+            </a:r>
+          </a:p>
+        </p:txBody>
+      </p:sp>
+      <p:sp>
+        <p:nvSpPr>
+          <p:cNvPr id="3" name="Content Placeholder 2"/>
+          <p:cNvSpPr>
+            <a:spLocks noGrp="1"/>
+          </p:cNvSpPr>
+          <p:nvPr>
+            <p:ph idx="1"/>
+          </p:nvPr>
+        </p:nvSpPr>
+        <p:spPr/>
+        <p:txBody>
+          <a:bodyPr/>
+          <a:lstStyle/>
+          <a:p>
+            <a:pPr lvl="0"/>
+            <a:r>
+              <a:rPr/>
+              <a:t>Monitor lower rated bridges more closely</a:t>
+            </a:r>
+          </a:p>
+          <a:p>
+            <a:pPr lvl="0"/>
+            <a:r>
+              <a:rPr/>
+              <a:t>Prioritize repairs</a:t>
+            </a:r>
+          </a:p>
+          <a:p>
+            <a:pPr lvl="0"/>
+            <a:r>
+              <a:rPr/>
+              <a:t>Continue inspections</a:t>
+            </a:r>
+          </a:p>
+          <a:p>
+            <a:pPr lvl="0"/>
+            <a:r>
+              <a:rPr/>
+              <a:t>Focus on high traffic bridges</a:t>
+            </a:r>
+          </a:p>
+        </p:txBody>
+      </p:sp>
+    </p:spTree>
+  </p:cSld>
+</p:sld>
+</file>
+
+<file path=ppt/slides/slide16.xml><?xml version="1.0" encoding="utf-8"?>
+<p:sld xmlns:a="http://schemas.openxmlformats.org/drawingml/2006/main" xmlns:r="http://schemas.openxmlformats.org/officeDocument/2006/relationships" xmlns:p="http://schemas.openxmlformats.org/presentationml/2006/main">
+  <p:cSld>
+    <p:spTree>
+      <p:nvGrpSpPr>
+        <p:cNvPr id="1" name=""/>
+        <p:cNvGrpSpPr/>
+        <p:nvPr/>
+      </p:nvGrpSpPr>
+      <p:grpSpPr>
+        <a:xfrm>
+          <a:off x="0" y="0"/>
+          <a:ext cx="0" cy="0"/>
+          <a:chOff x="0" y="0"/>
+          <a:chExt cx="0" cy="0"/>
+        </a:xfrm>
+      </p:grpSpPr>
+      <p:sp>
+        <p:nvSpPr>
+          <p:cNvPr id="2" name="Title 1"/>
+          <p:cNvSpPr>
+            <a:spLocks noGrp="1"/>
+          </p:cNvSpPr>
+          <p:nvPr>
+            <p:ph type="title"/>
+          </p:nvPr>
+        </p:nvSpPr>
+        <p:spPr/>
+        <p:txBody>
+          <a:bodyPr/>
+          <a:lstStyle/>
+          <a:p>
+            <a:pPr lvl="0" indent="0" marL="0">
+              <a:buNone/>
+            </a:pPr>
+            <a:r>
+              <a:rPr/>
+              <a:t>Final Takeaway</a:t>
+            </a:r>
+          </a:p>
+        </p:txBody>
+      </p:sp>
+      <p:sp>
+        <p:nvSpPr>
+          <p:cNvPr id="3" name="Content Placeholder 2"/>
+          <p:cNvSpPr>
+            <a:spLocks noGrp="1"/>
+          </p:cNvSpPr>
+          <p:nvPr>
+            <p:ph idx="1"/>
+          </p:nvPr>
+        </p:nvSpPr>
+        <p:spPr/>
+        <p:txBody>
+          <a:bodyPr/>
+          <a:lstStyle/>
+          <a:p>
+            <a:pPr lvl="0" indent="0" marL="0">
+              <a:buNone/>
+            </a:pPr>
+            <a:r>
+              <a:rPr/>
+              <a:t>Bridge collapse risk is low</a:t>
+            </a:r>
+          </a:p>
+          <a:p>
+            <a:pPr lvl="0" indent="0" marL="0">
+              <a:buNone/>
+            </a:pPr>
+            <a:r>
+              <a:rPr/>
+              <a:t>BUT</a:t>
+            </a:r>
+          </a:p>
+          <a:p>
+            <a:pPr lvl="0" indent="0" marL="0">
+              <a:buNone/>
+            </a:pPr>
+            <a:r>
+              <a:rPr/>
+              <a:t>Targeted maintenance is needed</a:t>
+            </a:r>
+          </a:p>
+        </p:txBody>
+      </p:sp>
+    </p:spTree>
+  </p:cSld>
+</p:sld>
+</file>
+
+<file path=ppt/slides/slide17.xml><?xml version="1.0" encoding="utf-8"?>
+<p:sld xmlns:a="http://schemas.openxmlformats.org/drawingml/2006/main" xmlns:r="http://schemas.openxmlformats.org/officeDocument/2006/relationships" xmlns:p="http://schemas.openxmlformats.org/presentationml/2006/main">
+  <p:cSld>
+    <p:spTree>
+      <p:nvGrpSpPr>
+        <p:cNvPr id="1" name=""/>
+        <p:cNvGrpSpPr/>
+        <p:nvPr/>
+      </p:nvGrpSpPr>
+      <p:grpSpPr>
+        <a:xfrm>
+          <a:off x="0" y="0"/>
+          <a:ext cx="0" cy="0"/>
+          <a:chOff x="0" y="0"/>
+          <a:chExt cx="0" cy="0"/>
+        </a:xfrm>
+      </p:grpSpPr>
+      <p:sp>
+        <p:nvSpPr>
+          <p:cNvPr id="2" name="Title 1"/>
+          <p:cNvSpPr>
+            <a:spLocks noGrp="1"/>
+          </p:cNvSpPr>
+          <p:nvPr>
+            <p:ph type="title"/>
+          </p:nvPr>
+        </p:nvSpPr>
+        <p:spPr/>
+        <p:txBody>
+          <a:bodyPr/>
+          <a:lstStyle/>
+          <a:p>
+            <a:pPr lvl="0" indent="0" marL="0">
+              <a:buNone/>
+            </a:pPr>
+            <a:r>
+              <a:rPr/>
+              <a:t>Thank You</a:t>
+            </a:r>
+          </a:p>
+        </p:txBody>
+      </p:sp>
+      <p:sp>
+        <p:nvSpPr>
+          <p:cNvPr id="3" name="Content Placeholder 2"/>
+          <p:cNvSpPr>
+            <a:spLocks noGrp="1"/>
+          </p:cNvSpPr>
+          <p:nvPr>
+            <p:ph idx="1"/>
+          </p:nvPr>
+        </p:nvSpPr>
+        <p:spPr/>
+        <p:txBody>
+          <a:bodyPr/>
+          <a:lstStyle/>
+          <a:p>
+            <a:pPr lvl="0" indent="0" marL="0">
+              <a:buNone/>
+            </a:pPr>
+            <a:r>
+              <a:rPr/>
+              <a:t>Questions?</a:t>
+            </a:r>
+          </a:p>
+        </p:txBody>
+      </p:sp>
+    </p:spTree>
+  </p:cSld>
+</p:sld>
+</file>
+
+<file path=ppt/slides/slide2.xml><?xml version="1.0" encoding="utf-8"?>
+<p:sld xmlns:a="http://schemas.openxmlformats.org/drawingml/2006/main" xmlns:r="http://schemas.openxmlformats.org/officeDocument/2006/relationships" xmlns:p="http://schemas.openxmlformats.org/presentationml/2006/main">
+  <p:cSld>
+    <p:spTree>
+      <p:nvGrpSpPr>
+        <p:cNvPr id="1" name=""/>
+        <p:cNvGrpSpPr/>
+        <p:nvPr/>
+      </p:nvGrpSpPr>
+      <p:grpSpPr>
+        <a:xfrm>
+          <a:off x="0" y="0"/>
+          <a:ext cx="0" cy="0"/>
+          <a:chOff x="0" y="0"/>
+          <a:chExt cx="0" cy="0"/>
+        </a:xfrm>
+      </p:grpSpPr>
+      <p:sp>
+        <p:nvSpPr>
+          <p:cNvPr id="2" name="Title 1"/>
+          <p:cNvSpPr>
+            <a:spLocks noGrp="1"/>
+          </p:cNvSpPr>
+          <p:nvPr>
+            <p:ph type="title"/>
+          </p:nvPr>
+        </p:nvSpPr>
+        <p:spPr/>
+        <p:txBody>
+          <a:bodyPr/>
+          <a:lstStyle/>
+          <a:p>
+            <a:pPr lvl="0" indent="0" marL="0">
+              <a:buNone/>
+            </a:pPr>
+            <a:r>
+              <a:rPr/>
+              <a:t>Why This Matters</a:t>
+            </a:r>
+          </a:p>
+        </p:txBody>
+      </p:sp>
+      <p:sp>
+        <p:nvSpPr>
+          <p:cNvPr id="3" name="Content Placeholder 2"/>
+          <p:cNvSpPr>
+            <a:spLocks noGrp="1"/>
+          </p:cNvSpPr>
+          <p:nvPr>
+            <p:ph idx="1" sz="half"/>
+          </p:nvPr>
+        </p:nvSpPr>
+        <p:spPr/>
+        <p:txBody>
+          <a:bodyPr/>
+          <a:lstStyle/>
+          <a:p>
+            <a:pPr lvl="0"/>
+            <a:r>
+              <a:rPr/>
+              <a:t>Bridge failures have happened in the U.S.</a:t>
+            </a:r>
+          </a:p>
+          <a:p>
+            <a:pPr lvl="0"/>
+            <a:r>
+              <a:rPr/>
+              <a:t>Can cause serious safety issues</a:t>
+            </a:r>
+          </a:p>
+          <a:p>
+            <a:pPr lvl="0"/>
+            <a:r>
+              <a:rPr/>
+              <a:t>Can disrupt major traffic routes</a:t>
+            </a:r>
+          </a:p>
+        </p:txBody>
+      </p:sp>
+      <p:pic>
+        <p:nvPicPr>
+          <p:cNvPr descr="PITTBridge.jpeg" id="0" name="Picture 1"/>
+          <p:cNvPicPr>
+            <a:picLocks noGrp="1" noChangeAspect="1"/>
+          </p:cNvPicPr>
+          <p:nvPr/>
+        </p:nvPicPr>
+        <p:blipFill>
+          <a:blip r:embed="rId2"/>
+          <a:stretch>
+            <a:fillRect/>
+          </a:stretch>
+        </p:blipFill>
+        <p:spPr bwMode="auto">
+          <a:xfrm>
+            <a:off x="4648200" y="1625600"/>
+            <a:ext cx="4038600" cy="2527300"/>
+          </a:xfrm>
+          <a:prstGeom prst="rect">
+            <a:avLst/>
+          </a:prstGeom>
+          <a:noFill/>
+          <a:ln w="9525">
+            <a:noFill/>
+            <a:headEnd/>
+            <a:tailEnd/>
+          </a:ln>
+        </p:spPr>
+      </p:pic>
+    </p:spTree>
+  </p:cSld>
+</p:sld>
+</file>
+
+<file path=ppt/slides/slide3.xml><?xml version="1.0" encoding="utf-8"?>
+<p:sld xmlns:a="http://schemas.openxmlformats.org/drawingml/2006/main" xmlns:r="http://schemas.openxmlformats.org/officeDocument/2006/relationships" xmlns:p="http://schemas.openxmlformats.org/presentationml/2006/main">
+  <p:cSld>
+    <p:spTree>
+      <p:nvGrpSpPr>
+        <p:cNvPr id="1" name=""/>
+        <p:cNvGrpSpPr/>
+        <p:nvPr/>
+      </p:nvGrpSpPr>
+      <p:grpSpPr>
+        <a:xfrm>
+          <a:off x="0" y="0"/>
+          <a:ext cx="0" cy="0"/>
+          <a:chOff x="0" y="0"/>
+          <a:chExt cx="0" cy="0"/>
+        </a:xfrm>
+      </p:grpSpPr>
+      <p:sp>
+        <p:nvSpPr>
+          <p:cNvPr id="2" name="Title 1"/>
+          <p:cNvSpPr>
+            <a:spLocks noGrp="1"/>
+          </p:cNvSpPr>
+          <p:nvPr>
+            <p:ph type="title"/>
+          </p:nvPr>
+        </p:nvSpPr>
+        <p:spPr/>
+        <p:txBody>
+          <a:bodyPr/>
+          <a:lstStyle/>
+          <a:p>
+            <a:pPr lvl="0" indent="0" marL="0">
+              <a:buNone/>
+            </a:pPr>
+            <a:r>
+              <a:rPr/>
+              <a:t>What I’ll Cover</a:t>
+            </a:r>
+          </a:p>
+        </p:txBody>
+      </p:sp>
+      <p:sp>
+        <p:nvSpPr>
+          <p:cNvPr id="3" name="Content Placeholder 2"/>
+          <p:cNvSpPr>
+            <a:spLocks noGrp="1"/>
+          </p:cNvSpPr>
+          <p:nvPr>
+            <p:ph idx="1"/>
+          </p:nvPr>
+        </p:nvSpPr>
+        <p:spPr/>
+        <p:txBody>
+          <a:bodyPr/>
+          <a:lstStyle/>
+          <a:p>
+            <a:pPr lvl="0"/>
+            <a:r>
+              <a:rPr/>
+              <a:t>Data used</a:t>
+            </a:r>
+          </a:p>
+          <a:p>
+            <a:pPr lvl="0"/>
+            <a:r>
+              <a:rPr/>
+              <a:t>How risk was calculated</a:t>
+            </a:r>
+          </a:p>
+          <a:p>
+            <a:pPr lvl="0"/>
+            <a:r>
+              <a:rPr/>
+              <a:t>Key findings</a:t>
+            </a:r>
+          </a:p>
+          <a:p>
+            <a:pPr lvl="0"/>
+            <a:r>
+              <a:rPr/>
+              <a:t>Recommendations</a:t>
+            </a:r>
+          </a:p>
+        </p:txBody>
+      </p:sp>
+    </p:spTree>
+  </p:cSld>
+</p:sld>
+</file>
+
+<file path=ppt/slides/slide4.xml><?xml version="1.0" encoding="utf-8"?>
+<p:sld xmlns:a="http://schemas.openxmlformats.org/drawingml/2006/main" xmlns:r="http://schemas.openxmlformats.org/officeDocument/2006/relationships" xmlns:p="http://schemas.openxmlformats.org/presentationml/2006/main">
+  <p:cSld>
+    <p:spTree>
+      <p:nvGrpSpPr>
+        <p:cNvPr id="1" name=""/>
+        <p:cNvGrpSpPr/>
+        <p:nvPr/>
+      </p:nvGrpSpPr>
+      <p:grpSpPr>
+        <a:xfrm>
+          <a:off x="0" y="0"/>
+          <a:ext cx="0" cy="0"/>
+          <a:chOff x="0" y="0"/>
+          <a:chExt cx="0" cy="0"/>
+        </a:xfrm>
+      </p:grpSpPr>
+      <p:sp>
+        <p:nvSpPr>
+          <p:cNvPr id="2" name="Title 1"/>
+          <p:cNvSpPr>
+            <a:spLocks noGrp="1"/>
+          </p:cNvSpPr>
+          <p:nvPr>
+            <p:ph type="title"/>
+          </p:nvPr>
+        </p:nvSpPr>
+        <p:spPr/>
+        <p:txBody>
+          <a:bodyPr/>
+          <a:lstStyle/>
+          <a:p>
+            <a:pPr lvl="0" indent="0" marL="0">
+              <a:buNone/>
+            </a:pPr>
+            <a:r>
+              <a:rPr/>
+              <a:t>Data Used</a:t>
+            </a:r>
+          </a:p>
+        </p:txBody>
+      </p:sp>
+      <p:sp>
+        <p:nvSpPr>
+          <p:cNvPr id="3" name="Content Placeholder 2"/>
+          <p:cNvSpPr>
+            <a:spLocks noGrp="1"/>
+          </p:cNvSpPr>
+          <p:nvPr>
+            <p:ph idx="1"/>
+          </p:nvPr>
+        </p:nvSpPr>
+        <p:spPr/>
+        <p:txBody>
+          <a:bodyPr/>
+          <a:lstStyle/>
+          <a:p>
+            <a:pPr lvl="0"/>
+            <a:r>
+              <a:rPr/>
+              <a:t>National Bridge Inventory (main data set)</a:t>
+            </a:r>
+          </a:p>
+          <a:p>
+            <a:pPr lvl="0"/>
+            <a:r>
+              <a:rPr/>
+              <a:t>Includes bridge condition and age</a:t>
+            </a:r>
+          </a:p>
+          <a:p>
+            <a:pPr lvl="0"/>
+            <a:r>
+              <a:rPr/>
+              <a:t>Traffic data used to measure impact</a:t>
+            </a:r>
+          </a:p>
+          <a:p>
+            <a:pPr lvl="0"/>
+            <a:r>
+              <a:rPr/>
+              <a:t>Nebraska Department of Transportation(NDOT) was used for additional context</a:t>
+            </a:r>
+          </a:p>
+          <a:p>
+            <a:pPr lvl="0"/>
+            <a:r>
+              <a:rPr/>
+              <a:t>511 bridges analyzed in Omaha</a:t>
+            </a:r>
+          </a:p>
+        </p:txBody>
+      </p:sp>
+    </p:spTree>
+  </p:cSld>
+</p:sld>
+</file>
+
+<file path=ppt/slides/slide5.xml><?xml version="1.0" encoding="utf-8"?>
+<p:sld xmlns:a="http://schemas.openxmlformats.org/drawingml/2006/main" xmlns:r="http://schemas.openxmlformats.org/officeDocument/2006/relationships" xmlns:p="http://schemas.openxmlformats.org/presentationml/2006/main">
+  <p:cSld>
+    <p:spTree>
+      <p:nvGrpSpPr>
+        <p:cNvPr id="1" name=""/>
+        <p:cNvGrpSpPr/>
+        <p:nvPr/>
+      </p:nvGrpSpPr>
+      <p:grpSpPr>
+        <a:xfrm>
+          <a:off x="0" y="0"/>
+          <a:ext cx="0" cy="0"/>
+          <a:chOff x="0" y="0"/>
+          <a:chExt cx="0" cy="0"/>
+        </a:xfrm>
+      </p:grpSpPr>
+      <p:sp>
+        <p:nvSpPr>
+          <p:cNvPr id="2" name="Title 1"/>
+          <p:cNvSpPr>
+            <a:spLocks noGrp="1"/>
+          </p:cNvSpPr>
+          <p:nvPr>
+            <p:ph type="title"/>
+          </p:nvPr>
+        </p:nvSpPr>
+        <p:spPr/>
+        <p:txBody>
+          <a:bodyPr/>
+          <a:lstStyle/>
+          <a:p>
+            <a:pPr lvl="0" indent="0" marL="0">
+              <a:buNone/>
+            </a:pPr>
+            <a:r>
+              <a:rPr/>
+              <a:t>Key Variables</a:t>
+            </a:r>
+          </a:p>
+        </p:txBody>
+      </p:sp>
+      <p:sp>
+        <p:nvSpPr>
+          <p:cNvPr id="3" name="Content Placeholder 2"/>
+          <p:cNvSpPr>
+            <a:spLocks noGrp="1"/>
+          </p:cNvSpPr>
+          <p:nvPr>
+            <p:ph idx="1"/>
+          </p:nvPr>
+        </p:nvSpPr>
+        <p:spPr/>
+        <p:txBody>
+          <a:bodyPr/>
+          <a:lstStyle/>
+          <a:p>
+            <a:pPr lvl="0"/>
+            <a:r>
+              <a:rPr/>
+              <a:t>Bridge age (calculated from year built)</a:t>
+            </a:r>
+          </a:p>
+          <a:p>
+            <a:pPr lvl="0"/>
+            <a:r>
+              <a:rPr/>
+              <a:t>Condition ratings (scale from 0–9)</a:t>
+            </a:r>
+          </a:p>
+          <a:p>
+            <a:pPr lvl="0"/>
+            <a:r>
+              <a:rPr/>
+              <a:t>Lowest condition rating used for analysis</a:t>
+            </a:r>
+          </a:p>
+          <a:p>
+            <a:pPr lvl="0"/>
+            <a:r>
+              <a:rPr/>
+              <a:t>Traffic (vehicles per day)</a:t>
+            </a:r>
+          </a:p>
+          <a:p>
+            <a:pPr lvl="0"/>
+            <a:r>
+              <a:rPr/>
+              <a:t>Poor condition defined as rating ≤ 4</a:t>
+            </a:r>
+          </a:p>
+        </p:txBody>
+      </p:sp>
+    </p:spTree>
+  </p:cSld>
+</p:sld>
+</file>
+
+<file path=ppt/slides/slide6.xml><?xml version="1.0" encoding="utf-8"?>
+<p:sld xmlns:a="http://schemas.openxmlformats.org/drawingml/2006/main" xmlns:r="http://schemas.openxmlformats.org/officeDocument/2006/relationships" xmlns:p="http://schemas.openxmlformats.org/presentationml/2006/main">
+  <p:cSld>
+    <p:spTree>
+      <p:nvGrpSpPr>
+        <p:cNvPr id="1" name=""/>
+        <p:cNvGrpSpPr/>
+        <p:nvPr/>
+      </p:nvGrpSpPr>
+      <p:grpSpPr>
+        <a:xfrm>
+          <a:off x="0" y="0"/>
+          <a:ext cx="0" cy="0"/>
+          <a:chOff x="0" y="0"/>
+          <a:chExt cx="0" cy="0"/>
+        </a:xfrm>
+      </p:grpSpPr>
+      <p:sp>
+        <p:nvSpPr>
+          <p:cNvPr id="2" name="Title 1"/>
+          <p:cNvSpPr>
+            <a:spLocks noGrp="1"/>
+          </p:cNvSpPr>
+          <p:nvPr>
+            <p:ph type="title"/>
+          </p:nvPr>
+        </p:nvSpPr>
+        <p:spPr/>
+        <p:txBody>
+          <a:bodyPr/>
+          <a:lstStyle/>
+          <a:p>
+            <a:pPr lvl="0" indent="0" marL="0">
+              <a:buNone/>
+            </a:pPr>
+            <a:r>
+              <a:rPr/>
+              <a:t>Methods</a:t>
+            </a:r>
+          </a:p>
+        </p:txBody>
+      </p:sp>
+      <p:sp>
+        <p:nvSpPr>
+          <p:cNvPr id="3" name="Content Placeholder 2"/>
+          <p:cNvSpPr>
+            <a:spLocks noGrp="1"/>
+          </p:cNvSpPr>
+          <p:nvPr>
+            <p:ph idx="1"/>
+          </p:nvPr>
+        </p:nvSpPr>
+        <p:spPr/>
+        <p:txBody>
+          <a:bodyPr/>
+          <a:lstStyle/>
+          <a:p>
+            <a:pPr lvl="0"/>
+            <a:r>
+              <a:rPr/>
+              <a:t>Filtered data to Omaha (Douglas County)</a:t>
+            </a:r>
+          </a:p>
+          <a:p>
+            <a:pPr lvl="0"/>
+            <a:r>
+              <a:rPr/>
+              <a:t>Removed bridges with missing data</a:t>
+            </a:r>
+          </a:p>
+          <a:p>
+            <a:pPr lvl="0"/>
+            <a:r>
+              <a:rPr/>
+              <a:t>Calculated bridge age</a:t>
+            </a:r>
+          </a:p>
+          <a:p>
+            <a:pPr lvl="0"/>
+            <a:r>
+              <a:rPr/>
+              <a:t>Identified bridges in poor condition</a:t>
+            </a:r>
+          </a:p>
+          <a:p>
+            <a:pPr lvl="0" indent="0" marL="0">
+              <a:buNone/>
+            </a:pPr>
+            <a:r>
+              <a:rPr b="1"/>
+              <a:t>Risk = Probability × Consequence</a:t>
+            </a:r>
+          </a:p>
+          <a:p>
+            <a:pPr lvl="0"/>
+            <a:r>
+              <a:rPr/>
+              <a:t>Condition ratings → probability of failure</a:t>
+            </a:r>
+          </a:p>
+          <a:p>
+            <a:pPr lvl="0"/>
+            <a:r>
+              <a:rPr/>
+              <a:t>Traffic → impact if failure occurs</a:t>
+            </a:r>
+          </a:p>
+        </p:txBody>
+      </p:sp>
+    </p:spTree>
+  </p:cSld>
+</p:sld>
+</file>
+
+<file path=ppt/slides/slide7.xml><?xml version="1.0" encoding="utf-8"?>
+<p:sld xmlns:a="http://schemas.openxmlformats.org/drawingml/2006/main" xmlns:r="http://schemas.openxmlformats.org/officeDocument/2006/relationships" xmlns:p="http://schemas.openxmlformats.org/presentationml/2006/main">
+  <p:cSld>
+    <p:spTree>
+      <p:nvGrpSpPr>
+        <p:cNvPr id="1" name=""/>
+        <p:cNvGrpSpPr/>
+        <p:nvPr/>
+      </p:nvGrpSpPr>
+      <p:grpSpPr>
+        <a:xfrm>
+          <a:off x="0" y="0"/>
+          <a:ext cx="0" cy="0"/>
+          <a:chOff x="0" y="0"/>
+          <a:chExt cx="0" cy="0"/>
+        </a:xfrm>
+      </p:grpSpPr>
+      <p:sp>
+        <p:nvSpPr>
+          <p:cNvPr id="2" name="Title 1"/>
+          <p:cNvSpPr>
+            <a:spLocks noGrp="1"/>
+          </p:cNvSpPr>
+          <p:nvPr>
+            <p:ph type="title"/>
+          </p:nvPr>
+        </p:nvSpPr>
+        <p:spPr/>
+        <p:txBody>
+          <a:bodyPr/>
+          <a:lstStyle/>
+          <a:p>
+            <a:pPr lvl="0" indent="0" marL="0">
+              <a:buNone/>
+            </a:pPr>
+            <a:r>
+              <a:rPr/>
+              <a:t>Example of Cleaned Data</a:t>
+            </a:r>
+          </a:p>
+        </p:txBody>
+      </p:sp>
+      <p:graphicFrame>
+        <p:nvGraphicFramePr>
+          <p:cNvPr id="6" name="Content Placeholder 5"/>
+          <p:cNvGraphicFramePr>
+            <a:graphicFrameLocks noGrp="1"/>
+          </p:cNvGraphicFramePr>
+          <p:nvPr>
+            <p:ph idx="1"/>
+          </p:nvPr>
+        </p:nvGraphicFramePr>
+        <p:xfrm>
+          <a:off x="457200" y="1193800"/>
+          <a:ext cx="8229600" cy="3390900"/>
+        </p:xfrm>
+        <a:graphic>
+          <a:graphicData uri="http://schemas.openxmlformats.org/drawingml/2006/table">
+            <a:tbl>
+              <a:tblPr firstRow="1" bandRow="1">
+                <a:tableStyleId>{5C22544A-7EE6-4342-B048-85BDC9FD1C3A}</a:tableStyleId>
+              </a:tblPr>
+              <a:tblGrid>
+                <a:gridCol w="609600"/>
+                <a:gridCol w="254000"/>
+                <a:gridCol w="749300"/>
+                <a:gridCol w="965200"/>
+                <a:gridCol w="393700"/>
+                <a:gridCol w="393700"/>
+                <a:gridCol w="431800"/>
+                <a:gridCol w="787400"/>
+                <a:gridCol w="711200"/>
+                <a:gridCol w="495300"/>
+                <a:gridCol w="609600"/>
+                <a:gridCol w="495300"/>
+                <a:gridCol w="787400"/>
+                <a:gridCol w="533400"/>
+              </a:tblGrid>
+              <a:tr h="0">
+                <a:tc>
+                  <a:txBody>
+                    <a:bodyPr/>
+                    <a:lstStyle/>
+                    <a:p>
+                      <a:pPr lvl="0" indent="0" marL="0" algn="l">
+                        <a:buNone/>
+                      </a:pPr>
+                      <a:r>
+                        <a:rPr/>
+                        <a:t>structure_number</a:t>
+                      </a:r>
+                    </a:p>
+                  </a:txBody>
+                  <a:tcPr/>
+                </a:tc>
+                <a:tc>
+                  <a:txBody>
+                    <a:bodyPr/>
+                    <a:lstStyle/>
+                    <a:p>
+                      <a:pPr lvl="0" indent="0" marL="0" algn="r">
+                        <a:buNone/>
+                      </a:pPr>
+                      <a:r>
+                        <a:rPr/>
+                        <a:t>county</a:t>
+                      </a:r>
+                    </a:p>
+                  </a:txBody>
+                  <a:tcPr/>
+                </a:tc>
+                <a:tc>
+                  <a:txBody>
+                    <a:bodyPr/>
+                    <a:lstStyle/>
+                    <a:p>
+                      <a:pPr lvl="0" indent="0" marL="0" algn="l">
+                        <a:buNone/>
+                      </a:pPr>
+                      <a:r>
+                        <a:rPr/>
+                        <a:t>facility_carried</a:t>
+                      </a:r>
+                    </a:p>
+                  </a:txBody>
+                  <a:tcPr/>
+                </a:tc>
+                <a:tc>
+                  <a:txBody>
+                    <a:bodyPr/>
+                    <a:lstStyle/>
+                    <a:p>
+                      <a:pPr lvl="0" indent="0" marL="0" algn="l">
+                        <a:buNone/>
+                      </a:pPr>
+                      <a:r>
+                        <a:rPr/>
+                        <a:t>location</a:t>
+                      </a:r>
+                    </a:p>
+                  </a:txBody>
+                  <a:tcPr/>
+                </a:tc>
+                <a:tc>
+                  <a:txBody>
+                    <a:bodyPr/>
+                    <a:lstStyle/>
+                    <a:p>
+                      <a:pPr lvl="0" indent="0" marL="0" algn="r">
+                        <a:buNone/>
+                      </a:pPr>
+                      <a:r>
+                        <a:rPr/>
+                        <a:t>year_built</a:t>
+                      </a:r>
+                    </a:p>
+                  </a:txBody>
+                  <a:tcPr/>
+                </a:tc>
+                <a:tc>
+                  <a:txBody>
+                    <a:bodyPr/>
+                    <a:lstStyle/>
+                    <a:p>
+                      <a:pPr lvl="0" indent="0" marL="0" algn="r">
+                        <a:buNone/>
+                      </a:pPr>
+                      <a:r>
+                        <a:rPr/>
+                        <a:t>bridge_age</a:t>
+                      </a:r>
+                    </a:p>
+                  </a:txBody>
+                  <a:tcPr/>
+                </a:tc>
+                <a:tc>
+                  <a:txBody>
+                    <a:bodyPr/>
+                    <a:lstStyle/>
+                    <a:p>
+                      <a:pPr lvl="0" indent="0" marL="0" algn="l">
+                        <a:buNone/>
+                      </a:pPr>
+                      <a:r>
+                        <a:rPr/>
+                        <a:t>deck_rating</a:t>
+                      </a:r>
+                    </a:p>
+                  </a:txBody>
+                  <a:tcPr/>
+                </a:tc>
+                <a:tc>
+                  <a:txBody>
+                    <a:bodyPr/>
+                    <a:lstStyle/>
+                    <a:p>
+                      <a:pPr lvl="0" indent="0" marL="0" algn="l">
+                        <a:buNone/>
+                      </a:pPr>
+                      <a:r>
+                        <a:rPr/>
+                        <a:t>superstructure_rating</a:t>
+                      </a:r>
+                    </a:p>
+                  </a:txBody>
+                  <a:tcPr/>
+                </a:tc>
+                <a:tc>
+                  <a:txBody>
+                    <a:bodyPr/>
+                    <a:lstStyle/>
+                    <a:p>
+                      <a:pPr lvl="0" indent="0" marL="0" algn="l">
+                        <a:buNone/>
+                      </a:pPr>
+                      <a:r>
+                        <a:rPr/>
+                        <a:t>substructure_rating</a:t>
+                      </a:r>
+                    </a:p>
+                  </a:txBody>
+                  <a:tcPr/>
+                </a:tc>
+                <a:tc>
+                  <a:txBody>
+                    <a:bodyPr/>
+                    <a:lstStyle/>
+                    <a:p>
+                      <a:pPr lvl="0" indent="0" marL="0" algn="r">
+                        <a:buNone/>
+                      </a:pPr>
+                      <a:r>
+                        <a:rPr/>
+                        <a:t>lowest_rating</a:t>
+                      </a:r>
+                    </a:p>
+                  </a:txBody>
+                  <a:tcPr/>
+                </a:tc>
+                <a:tc>
+                  <a:txBody>
+                    <a:bodyPr/>
+                    <a:lstStyle/>
+                    <a:p>
+                      <a:pPr lvl="0" indent="0" marL="0" algn="l">
+                        <a:buNone/>
+                      </a:pPr>
+                      <a:r>
+                        <a:rPr/>
+                        <a:t>bridge_condition</a:t>
+                      </a:r>
+                    </a:p>
+                  </a:txBody>
+                  <a:tcPr/>
+                </a:tc>
+                <a:tc>
+                  <a:txBody>
+                    <a:bodyPr/>
+                    <a:lstStyle/>
+                    <a:p>
+                      <a:pPr lvl="0" indent="0" marL="0" algn="r">
+                        <a:buNone/>
+                      </a:pPr>
+                      <a:r>
+                        <a:rPr/>
+                        <a:t>daily_traffic</a:t>
+                      </a:r>
+                    </a:p>
+                  </a:txBody>
+                  <a:tcPr/>
+                </a:tc>
+                <a:tc>
+                  <a:txBody>
+                    <a:bodyPr/>
+                    <a:lstStyle/>
+                    <a:p>
+                      <a:pPr lvl="0" indent="0" marL="0" algn="r">
+                        <a:buNone/>
+                      </a:pPr>
+                      <a:r>
+                        <a:rPr/>
+                        <a:t>percent_truck_traffic</a:t>
+                      </a:r>
+                    </a:p>
+                  </a:txBody>
+                  <a:tcPr/>
+                </a:tc>
+                <a:tc>
+                  <a:txBody>
+                    <a:bodyPr/>
+                    <a:lstStyle/>
+                    <a:p>
+                      <a:pPr lvl="0" indent="0" marL="0" algn="l">
+                        <a:buNone/>
+                      </a:pPr>
+                      <a:r>
+                        <a:rPr/>
+                        <a:t>poor_condition</a:t>
+                      </a:r>
+                    </a:p>
+                  </a:txBody>
+                  <a:tcPr/>
+                </a:tc>
+              </a:tr>
+              <a:tr h="0">
+                <a:tc>
+                  <a:txBody>
+                    <a:bodyPr/>
+                    <a:lstStyle/>
+                    <a:p>
+                      <a:pPr lvl="0" indent="0" marL="0" algn="l">
+                        <a:buNone/>
+                      </a:pPr>
+                      <a:r>
+                        <a:rPr/>
+                        <a:t>C002800205P</a:t>
+                      </a:r>
+                    </a:p>
+                  </a:txBody>
+                </a:tc>
+                <a:tc>
+                  <a:txBody>
+                    <a:bodyPr/>
+                    <a:lstStyle/>
+                    <a:p>
+                      <a:pPr lvl="0" indent="0" marL="0" algn="r">
+                        <a:buNone/>
+                      </a:pPr>
+                      <a:r>
+                        <a:rPr/>
+                        <a:t>55</a:t>
+                      </a:r>
+                    </a:p>
+                  </a:txBody>
+                </a:tc>
+                <a:tc>
+                  <a:txBody>
+                    <a:bodyPr/>
+                    <a:lstStyle/>
+                    <a:p>
+                      <a:pPr lvl="0" indent="0" marL="0" algn="l">
+                        <a:buNone/>
+                      </a:pPr>
+                      <a:r>
+                        <a:rPr/>
+                        <a:t>‘COUNTRY ROAD’</a:t>
+                      </a:r>
+                    </a:p>
+                  </a:txBody>
+                </a:tc>
+                <a:tc>
+                  <a:txBody>
+                    <a:bodyPr/>
+                    <a:lstStyle/>
+                    <a:p>
+                      <a:pPr lvl="0" indent="0" marL="0" algn="l">
+                        <a:buNone/>
+                      </a:pPr>
+                      <a:r>
+                        <a:rPr/>
+                        <a:t>‘.3M W OF 276TH STREET’</a:t>
+                      </a:r>
+                    </a:p>
+                  </a:txBody>
+                </a:tc>
+                <a:tc>
+                  <a:txBody>
+                    <a:bodyPr/>
+                    <a:lstStyle/>
+                    <a:p>
+                      <a:pPr lvl="0" indent="0" marL="0" algn="r">
+                        <a:buNone/>
+                      </a:pPr>
+                      <a:r>
+                        <a:rPr/>
+                        <a:t>1927</a:t>
+                      </a:r>
+                    </a:p>
+                  </a:txBody>
+                </a:tc>
+                <a:tc>
+                  <a:txBody>
+                    <a:bodyPr/>
+                    <a:lstStyle/>
+                    <a:p>
+                      <a:pPr lvl="0" indent="0" marL="0" algn="r">
+                        <a:buNone/>
+                      </a:pPr>
+                      <a:r>
+                        <a:rPr/>
+                        <a:t>99</a:t>
+                      </a:r>
+                    </a:p>
+                  </a:txBody>
+                </a:tc>
+                <a:tc>
+                  <a:txBody>
+                    <a:bodyPr/>
+                    <a:lstStyle/>
+                    <a:p>
+                      <a:pPr lvl="0" indent="0" marL="0" algn="l">
+                        <a:buNone/>
+                      </a:pPr>
+                      <a:r>
+                        <a:rPr/>
+                        <a:t>5</a:t>
+                      </a:r>
+                    </a:p>
+                  </a:txBody>
+                </a:tc>
+                <a:tc>
+                  <a:txBody>
+                    <a:bodyPr/>
+                    <a:lstStyle/>
+                    <a:p>
+                      <a:pPr lvl="0" indent="0" marL="0" algn="l">
+                        <a:buNone/>
+                      </a:pPr>
+                      <a:r>
+                        <a:rPr/>
+                        <a:t>6</a:t>
+                      </a:r>
+                    </a:p>
+                  </a:txBody>
+                </a:tc>
+                <a:tc>
+                  <a:txBody>
+                    <a:bodyPr/>
+                    <a:lstStyle/>
+                    <a:p>
+                      <a:pPr lvl="0" indent="0" marL="0" algn="l">
+                        <a:buNone/>
+                      </a:pPr>
+                      <a:r>
+                        <a:rPr/>
+                        <a:t>6</a:t>
+                      </a:r>
+                    </a:p>
+                  </a:txBody>
+                </a:tc>
+                <a:tc>
+                  <a:txBody>
+                    <a:bodyPr/>
+                    <a:lstStyle/>
+                    <a:p>
+                      <a:pPr lvl="0" indent="0" marL="0" algn="r">
+                        <a:buNone/>
+                      </a:pPr>
+                      <a:r>
+                        <a:rPr/>
+                        <a:t>5</a:t>
+                      </a:r>
+                    </a:p>
+                  </a:txBody>
+                </a:tc>
+                <a:tc>
+                  <a:txBody>
+                    <a:bodyPr/>
+                    <a:lstStyle/>
+                    <a:p>
+                      <a:pPr lvl="0" indent="0" marL="0" algn="l">
+                        <a:buNone/>
+                      </a:pPr>
+                      <a:r>
+                        <a:rPr/>
+                        <a:t>F</a:t>
+                      </a:r>
+                    </a:p>
+                  </a:txBody>
+                </a:tc>
+                <a:tc>
+                  <a:txBody>
+                    <a:bodyPr/>
+                    <a:lstStyle/>
+                    <a:p>
+                      <a:pPr lvl="0" indent="0" marL="0" algn="r">
+                        <a:buNone/>
+                      </a:pPr>
+                      <a:r>
+                        <a:rPr/>
+                        <a:t>81</a:t>
+                      </a:r>
+                    </a:p>
+                  </a:txBody>
+                </a:tc>
+                <a:tc>
+                  <a:txBody>
+                    <a:bodyPr/>
+                    <a:lstStyle/>
+                    <a:p>
+                      <a:pPr lvl="0" indent="0" marL="0" algn="r">
+                        <a:buNone/>
+                      </a:pPr>
+                      <a:r>
+                        <a:rPr/>
+                        <a:t>10</a:t>
+                      </a:r>
+                    </a:p>
+                  </a:txBody>
+                </a:tc>
+                <a:tc>
+                  <a:txBody>
+                    <a:bodyPr/>
+                    <a:lstStyle/>
+                    <a:p>
+                      <a:pPr lvl="0" indent="0" marL="0" algn="l">
+                        <a:buNone/>
+                      </a:pPr>
+                      <a:r>
+                        <a:rPr/>
+                        <a:t>FALSE</a:t>
+                      </a:r>
+                    </a:p>
+                  </a:txBody>
+                </a:tc>
+              </a:tr>
+              <a:tr h="0">
+                <a:tc>
+                  <a:txBody>
+                    <a:bodyPr/>
+                    <a:lstStyle/>
+                    <a:p>
+                      <a:pPr lvl="0" indent="0" marL="0" algn="l">
+                        <a:buNone/>
+                      </a:pPr>
+                      <a:r>
+                        <a:rPr/>
+                        <a:t>C002800403</a:t>
+                      </a:r>
+                    </a:p>
+                  </a:txBody>
+                </a:tc>
+                <a:tc>
+                  <a:txBody>
+                    <a:bodyPr/>
+                    <a:lstStyle/>
+                    <a:p>
+                      <a:pPr lvl="0" indent="0" marL="0" algn="r">
+                        <a:buNone/>
+                      </a:pPr>
+                      <a:r>
+                        <a:rPr/>
+                        <a:t>55</a:t>
+                      </a:r>
+                    </a:p>
+                  </a:txBody>
+                </a:tc>
+                <a:tc>
+                  <a:txBody>
+                    <a:bodyPr/>
+                    <a:lstStyle/>
+                    <a:p>
+                      <a:pPr lvl="0" indent="0" marL="0" algn="l">
+                        <a:buNone/>
+                      </a:pPr>
+                      <a:r>
+                        <a:rPr/>
+                        <a:t>‘PAWNEE ROAD’</a:t>
+                      </a:r>
+                    </a:p>
+                  </a:txBody>
+                </a:tc>
+                <a:tc>
+                  <a:txBody>
+                    <a:bodyPr/>
+                    <a:lstStyle/>
+                    <a:p>
+                      <a:pPr lvl="0" indent="0" marL="0" algn="l">
+                        <a:buNone/>
+                      </a:pPr>
+                      <a:r>
+                        <a:rPr/>
+                        <a:t>‘1S 2.5W N133/WASHGTON CL’</a:t>
+                      </a:r>
+                    </a:p>
+                  </a:txBody>
+                </a:tc>
+                <a:tc>
+                  <a:txBody>
+                    <a:bodyPr/>
+                    <a:lstStyle/>
+                    <a:p>
+                      <a:pPr lvl="0" indent="0" marL="0" algn="r">
+                        <a:buNone/>
+                      </a:pPr>
+                      <a:r>
+                        <a:rPr/>
+                        <a:t>1992</a:t>
+                      </a:r>
+                    </a:p>
+                  </a:txBody>
+                </a:tc>
+                <a:tc>
+                  <a:txBody>
+                    <a:bodyPr/>
+                    <a:lstStyle/>
+                    <a:p>
+                      <a:pPr lvl="0" indent="0" marL="0" algn="r">
+                        <a:buNone/>
+                      </a:pPr>
+                      <a:r>
+                        <a:rPr/>
+                        <a:t>34</a:t>
+                      </a:r>
+                    </a:p>
+                  </a:txBody>
+                </a:tc>
+                <a:tc>
+                  <a:txBody>
+                    <a:bodyPr/>
+                    <a:lstStyle/>
+                    <a:p>
+                      <a:pPr lvl="0" indent="0" marL="0" algn="l">
+                        <a:buNone/>
+                      </a:pPr>
+                      <a:r>
+                        <a:rPr/>
+                        <a:t>N</a:t>
+                      </a:r>
+                    </a:p>
+                  </a:txBody>
+                </a:tc>
+                <a:tc>
+                  <a:txBody>
+                    <a:bodyPr/>
+                    <a:lstStyle/>
+                    <a:p>
+                      <a:pPr lvl="0" indent="0" marL="0" algn="l">
+                        <a:buNone/>
+                      </a:pPr>
+                      <a:r>
+                        <a:rPr/>
+                        <a:t>N</a:t>
+                      </a:r>
+                    </a:p>
+                  </a:txBody>
+                </a:tc>
+                <a:tc>
+                  <a:txBody>
+                    <a:bodyPr/>
+                    <a:lstStyle/>
+                    <a:p>
+                      <a:pPr lvl="0" indent="0" marL="0" algn="l">
+                        <a:buNone/>
+                      </a:pPr>
+                      <a:r>
+                        <a:rPr/>
+                        <a:t>N</a:t>
+                      </a:r>
+                    </a:p>
+                  </a:txBody>
+                </a:tc>
+                <a:tc>
+                  <a:txBody>
+                    <a:bodyPr/>
+                    <a:lstStyle/>
+                    <a:p>
+                      <a:pPr lvl="0" indent="0" marL="0" algn="r">
+                        <a:buNone/>
+                      </a:pPr>
+                      <a:r>
+                        <a:rPr/>
+                        <a:t>5</a:t>
+                      </a:r>
+                    </a:p>
+                  </a:txBody>
+                </a:tc>
+                <a:tc>
+                  <a:txBody>
+                    <a:bodyPr/>
+                    <a:lstStyle/>
+                    <a:p>
+                      <a:pPr lvl="0" indent="0" marL="0" algn="l">
+                        <a:buNone/>
+                      </a:pPr>
+                      <a:r>
+                        <a:rPr/>
+                        <a:t>F</a:t>
+                      </a:r>
+                    </a:p>
+                  </a:txBody>
+                </a:tc>
+                <a:tc>
+                  <a:txBody>
+                    <a:bodyPr/>
+                    <a:lstStyle/>
+                    <a:p>
+                      <a:pPr lvl="0" indent="0" marL="0" algn="r">
+                        <a:buNone/>
+                      </a:pPr>
+                      <a:r>
+                        <a:rPr/>
+                        <a:t>116</a:t>
+                      </a:r>
+                    </a:p>
+                  </a:txBody>
+                </a:tc>
+                <a:tc>
+                  <a:txBody>
+                    <a:bodyPr/>
+                    <a:lstStyle/>
+                    <a:p>
+                      <a:pPr lvl="0" indent="0" marL="0" algn="r">
+                        <a:buNone/>
+                      </a:pPr>
+                      <a:r>
+                        <a:rPr/>
+                        <a:t>0</a:t>
+                      </a:r>
+                    </a:p>
+                  </a:txBody>
+                </a:tc>
+                <a:tc>
+                  <a:txBody>
+                    <a:bodyPr/>
+                    <a:lstStyle/>
+                    <a:p>
+                      <a:pPr lvl="0" indent="0" marL="0" algn="l">
+                        <a:buNone/>
+                      </a:pPr>
+                      <a:r>
+                        <a:rPr/>
+                        <a:t>FALSE</a:t>
+                      </a:r>
+                    </a:p>
+                  </a:txBody>
+                </a:tc>
+              </a:tr>
+              <a:tr h="0">
+                <a:tc>
+                  <a:txBody>
+                    <a:bodyPr/>
+                    <a:lstStyle/>
+                    <a:p>
+                      <a:pPr lvl="0" indent="0" marL="0" algn="l">
+                        <a:buNone/>
+                      </a:pPr>
+                      <a:r>
+                        <a:rPr/>
+                        <a:t>C002800405</a:t>
+                      </a:r>
+                    </a:p>
+                  </a:txBody>
+                </a:tc>
+                <a:tc>
+                  <a:txBody>
+                    <a:bodyPr/>
+                    <a:lstStyle/>
+                    <a:p>
+                      <a:pPr lvl="0" indent="0" marL="0" algn="r">
+                        <a:buNone/>
+                      </a:pPr>
+                      <a:r>
+                        <a:rPr/>
+                        <a:t>55</a:t>
+                      </a:r>
+                    </a:p>
+                  </a:txBody>
+                </a:tc>
+                <a:tc>
+                  <a:txBody>
+                    <a:bodyPr/>
+                    <a:lstStyle/>
+                    <a:p>
+                      <a:pPr lvl="0" indent="0" marL="0" algn="l">
+                        <a:buNone/>
+                      </a:pPr>
+                      <a:r>
+                        <a:rPr/>
+                        <a:t>‘PAWNEE ROAD’</a:t>
+                      </a:r>
+                    </a:p>
+                  </a:txBody>
+                </a:tc>
+                <a:tc>
+                  <a:txBody>
+                    <a:bodyPr/>
+                    <a:lstStyle/>
+                    <a:p>
+                      <a:pPr lvl="0" indent="0" marL="0" algn="l">
+                        <a:buNone/>
+                      </a:pPr>
+                      <a:r>
+                        <a:rPr/>
+                        <a:t>‘JCT N36/N133 1N .8E’</a:t>
+                      </a:r>
+                    </a:p>
+                  </a:txBody>
+                </a:tc>
+                <a:tc>
+                  <a:txBody>
+                    <a:bodyPr/>
+                    <a:lstStyle/>
+                    <a:p>
+                      <a:pPr lvl="0" indent="0" marL="0" algn="r">
+                        <a:buNone/>
+                      </a:pPr>
+                      <a:r>
+                        <a:rPr/>
+                        <a:t>2010</a:t>
+                      </a:r>
+                    </a:p>
+                  </a:txBody>
+                </a:tc>
+                <a:tc>
+                  <a:txBody>
+                    <a:bodyPr/>
+                    <a:lstStyle/>
+                    <a:p>
+                      <a:pPr lvl="0" indent="0" marL="0" algn="r">
+                        <a:buNone/>
+                      </a:pPr>
+                      <a:r>
+                        <a:rPr/>
+                        <a:t>16</a:t>
+                      </a:r>
+                    </a:p>
+                  </a:txBody>
+                </a:tc>
+                <a:tc>
+                  <a:txBody>
+                    <a:bodyPr/>
+                    <a:lstStyle/>
+                    <a:p>
+                      <a:pPr lvl="0" indent="0" marL="0" algn="l">
+                        <a:buNone/>
+                      </a:pPr>
+                      <a:r>
+                        <a:rPr/>
+                        <a:t>7</a:t>
+                      </a:r>
+                    </a:p>
+                  </a:txBody>
+                </a:tc>
+                <a:tc>
+                  <a:txBody>
+                    <a:bodyPr/>
+                    <a:lstStyle/>
+                    <a:p>
+                      <a:pPr lvl="0" indent="0" marL="0" algn="l">
+                        <a:buNone/>
+                      </a:pPr>
+                      <a:r>
+                        <a:rPr/>
+                        <a:t>8</a:t>
+                      </a:r>
+                    </a:p>
+                  </a:txBody>
+                </a:tc>
+                <a:tc>
+                  <a:txBody>
+                    <a:bodyPr/>
+                    <a:lstStyle/>
+                    <a:p>
+                      <a:pPr lvl="0" indent="0" marL="0" algn="l">
+                        <a:buNone/>
+                      </a:pPr>
+                      <a:r>
+                        <a:rPr/>
+                        <a:t>7</a:t>
+                      </a:r>
+                    </a:p>
+                  </a:txBody>
+                </a:tc>
+                <a:tc>
+                  <a:txBody>
+                    <a:bodyPr/>
+                    <a:lstStyle/>
+                    <a:p>
+                      <a:pPr lvl="0" indent="0" marL="0" algn="r">
+                        <a:buNone/>
+                      </a:pPr>
+                      <a:r>
+                        <a:rPr/>
+                        <a:t>7</a:t>
+                      </a:r>
+                    </a:p>
+                  </a:txBody>
+                </a:tc>
+                <a:tc>
+                  <a:txBody>
+                    <a:bodyPr/>
+                    <a:lstStyle/>
+                    <a:p>
+                      <a:pPr lvl="0" indent="0" marL="0" algn="l">
+                        <a:buNone/>
+                      </a:pPr>
+                      <a:r>
+                        <a:rPr/>
+                        <a:t>G</a:t>
+                      </a:r>
+                    </a:p>
+                  </a:txBody>
+                </a:tc>
+                <a:tc>
+                  <a:txBody>
+                    <a:bodyPr/>
+                    <a:lstStyle/>
+                    <a:p>
+                      <a:pPr lvl="0" indent="0" marL="0" algn="r">
+                        <a:buNone/>
+                      </a:pPr>
+                      <a:r>
+                        <a:rPr/>
+                        <a:t>85</a:t>
+                      </a:r>
+                    </a:p>
+                  </a:txBody>
+                </a:tc>
+                <a:tc>
+                  <a:txBody>
+                    <a:bodyPr/>
+                    <a:lstStyle/>
+                    <a:p>
+                      <a:pPr lvl="0" indent="0" marL="0" algn="r">
+                        <a:buNone/>
+                      </a:pPr>
+                      <a:r>
+                        <a:rPr/>
+                        <a:t>0</a:t>
+                      </a:r>
+                    </a:p>
+                  </a:txBody>
+                </a:tc>
+                <a:tc>
+                  <a:txBody>
+                    <a:bodyPr/>
+                    <a:lstStyle/>
+                    <a:p>
+                      <a:pPr lvl="0" indent="0" marL="0" algn="l">
+                        <a:buNone/>
+                      </a:pPr>
+                      <a:r>
+                        <a:rPr/>
+                        <a:t>FALSE</a:t>
+                      </a:r>
+                    </a:p>
+                  </a:txBody>
+                </a:tc>
+              </a:tr>
+              <a:tr h="0">
+                <a:tc>
+                  <a:txBody>
+                    <a:bodyPr/>
+                    <a:lstStyle/>
+                    <a:p>
+                      <a:pPr lvl="0" indent="0" marL="0" algn="l">
+                        <a:buNone/>
+                      </a:pPr>
+                      <a:r>
+                        <a:rPr/>
+                        <a:t>C002800410</a:t>
+                      </a:r>
+                    </a:p>
+                  </a:txBody>
+                </a:tc>
+                <a:tc>
+                  <a:txBody>
+                    <a:bodyPr/>
+                    <a:lstStyle/>
+                    <a:p>
+                      <a:pPr lvl="0" indent="0" marL="0" algn="r">
+                        <a:buNone/>
+                      </a:pPr>
+                      <a:r>
+                        <a:rPr/>
+                        <a:t>55</a:t>
+                      </a:r>
+                    </a:p>
+                  </a:txBody>
+                </a:tc>
+                <a:tc>
+                  <a:txBody>
+                    <a:bodyPr/>
+                    <a:lstStyle/>
+                    <a:p>
+                      <a:pPr lvl="0" indent="0" marL="0" algn="l">
+                        <a:buNone/>
+                      </a:pPr>
+                      <a:r>
+                        <a:rPr/>
+                        <a:t>‘PAWNEE ROAD’</a:t>
+                      </a:r>
+                    </a:p>
+                  </a:txBody>
+                </a:tc>
+                <a:tc>
+                  <a:txBody>
+                    <a:bodyPr/>
+                    <a:lstStyle/>
+                    <a:p>
+                      <a:pPr lvl="0" indent="0" marL="0" algn="l">
+                        <a:buNone/>
+                      </a:pPr>
+                      <a:r>
+                        <a:rPr/>
+                        <a:t>‘JCT N36/N133 1N 1E’</a:t>
+                      </a:r>
+                    </a:p>
+                  </a:txBody>
+                </a:tc>
+                <a:tc>
+                  <a:txBody>
+                    <a:bodyPr/>
+                    <a:lstStyle/>
+                    <a:p>
+                      <a:pPr lvl="0" indent="0" marL="0" algn="r">
+                        <a:buNone/>
+                      </a:pPr>
+                      <a:r>
+                        <a:rPr/>
+                        <a:t>2020</a:t>
+                      </a:r>
+                    </a:p>
+                  </a:txBody>
+                </a:tc>
+                <a:tc>
+                  <a:txBody>
+                    <a:bodyPr/>
+                    <a:lstStyle/>
+                    <a:p>
+                      <a:pPr lvl="0" indent="0" marL="0" algn="r">
+                        <a:buNone/>
+                      </a:pPr>
+                      <a:r>
+                        <a:rPr/>
+                        <a:t>6</a:t>
+                      </a:r>
+                    </a:p>
+                  </a:txBody>
+                </a:tc>
+                <a:tc>
+                  <a:txBody>
+                    <a:bodyPr/>
+                    <a:lstStyle/>
+                    <a:p>
+                      <a:pPr lvl="0" indent="0" marL="0" algn="l">
+                        <a:buNone/>
+                      </a:pPr>
+                      <a:r>
+                        <a:rPr/>
+                        <a:t>7</a:t>
+                      </a:r>
+                    </a:p>
+                  </a:txBody>
+                </a:tc>
+                <a:tc>
+                  <a:txBody>
+                    <a:bodyPr/>
+                    <a:lstStyle/>
+                    <a:p>
+                      <a:pPr lvl="0" indent="0" marL="0" algn="l">
+                        <a:buNone/>
+                      </a:pPr>
+                      <a:r>
+                        <a:rPr/>
+                        <a:t>7</a:t>
+                      </a:r>
+                    </a:p>
+                  </a:txBody>
+                </a:tc>
+                <a:tc>
+                  <a:txBody>
+                    <a:bodyPr/>
+                    <a:lstStyle/>
+                    <a:p>
+                      <a:pPr lvl="0" indent="0" marL="0" algn="l">
+                        <a:buNone/>
+                      </a:pPr>
+                      <a:r>
+                        <a:rPr/>
+                        <a:t>8</a:t>
+                      </a:r>
+                    </a:p>
+                  </a:txBody>
+                </a:tc>
+                <a:tc>
+                  <a:txBody>
+                    <a:bodyPr/>
+                    <a:lstStyle/>
+                    <a:p>
+                      <a:pPr lvl="0" indent="0" marL="0" algn="r">
+                        <a:buNone/>
+                      </a:pPr>
+                      <a:r>
+                        <a:rPr/>
+                        <a:t>7</a:t>
+                      </a:r>
+                    </a:p>
+                  </a:txBody>
+                </a:tc>
+                <a:tc>
+                  <a:txBody>
+                    <a:bodyPr/>
+                    <a:lstStyle/>
+                    <a:p>
+                      <a:pPr lvl="0" indent="0" marL="0" algn="l">
+                        <a:buNone/>
+                      </a:pPr>
+                      <a:r>
+                        <a:rPr/>
+                        <a:t>G</a:t>
+                      </a:r>
+                    </a:p>
+                  </a:txBody>
+                </a:tc>
+                <a:tc>
+                  <a:txBody>
+                    <a:bodyPr/>
+                    <a:lstStyle/>
+                    <a:p>
+                      <a:pPr lvl="0" indent="0" marL="0" algn="r">
+                        <a:buNone/>
+                      </a:pPr>
+                      <a:r>
+                        <a:rPr/>
+                        <a:t>57</a:t>
+                      </a:r>
+                    </a:p>
+                  </a:txBody>
+                </a:tc>
+                <a:tc>
+                  <a:txBody>
+                    <a:bodyPr/>
+                    <a:lstStyle/>
+                    <a:p>
+                      <a:pPr lvl="0" indent="0" marL="0" algn="r">
+                        <a:buNone/>
+                      </a:pPr>
+                      <a:r>
+                        <a:rPr/>
+                        <a:t>0</a:t>
+                      </a:r>
+                    </a:p>
+                  </a:txBody>
+                </a:tc>
+                <a:tc>
+                  <a:txBody>
+                    <a:bodyPr/>
+                    <a:lstStyle/>
+                    <a:p>
+                      <a:pPr lvl="0" indent="0" marL="0" algn="l">
+                        <a:buNone/>
+                      </a:pPr>
+                      <a:r>
+                        <a:rPr/>
+                        <a:t>FALSE</a:t>
+                      </a:r>
+                    </a:p>
+                  </a:txBody>
+                </a:tc>
+              </a:tr>
+              <a:tr h="0">
+                <a:tc>
+                  <a:txBody>
+                    <a:bodyPr/>
+                    <a:lstStyle/>
+                    <a:p>
+                      <a:pPr lvl="0" indent="0" marL="0" algn="l">
+                        <a:buNone/>
+                      </a:pPr>
+                      <a:r>
+                        <a:rPr/>
+                        <a:t>C002800420P</a:t>
+                      </a:r>
+                    </a:p>
+                  </a:txBody>
+                </a:tc>
+                <a:tc>
+                  <a:txBody>
+                    <a:bodyPr/>
+                    <a:lstStyle/>
+                    <a:p>
+                      <a:pPr lvl="0" indent="0" marL="0" algn="r">
+                        <a:buNone/>
+                      </a:pPr>
+                      <a:r>
+                        <a:rPr/>
+                        <a:t>55</a:t>
+                      </a:r>
+                    </a:p>
+                  </a:txBody>
+                </a:tc>
+                <a:tc>
+                  <a:txBody>
+                    <a:bodyPr/>
+                    <a:lstStyle/>
+                    <a:p>
+                      <a:pPr lvl="0" indent="0" marL="0" algn="l">
+                        <a:buNone/>
+                      </a:pPr>
+                      <a:r>
+                        <a:rPr/>
+                        <a:t>‘PONCA RD/COLL 7949’</a:t>
+                      </a:r>
+                    </a:p>
+                  </a:txBody>
+                </a:tc>
+                <a:tc>
+                  <a:txBody>
+                    <a:bodyPr/>
+                    <a:lstStyle/>
+                    <a:p>
+                      <a:pPr lvl="0" indent="0" marL="0" algn="l">
+                        <a:buNone/>
+                      </a:pPr>
+                      <a:r>
+                        <a:rPr/>
+                        <a:t>‘42ND &amp; PONCA ROAD’</a:t>
+                      </a:r>
+                    </a:p>
+                  </a:txBody>
+                </a:tc>
+                <a:tc>
+                  <a:txBody>
+                    <a:bodyPr/>
+                    <a:lstStyle/>
+                    <a:p>
+                      <a:pPr lvl="0" indent="0" marL="0" algn="r">
+                        <a:buNone/>
+                      </a:pPr>
+                      <a:r>
+                        <a:rPr/>
+                        <a:t>1985</a:t>
+                      </a:r>
+                    </a:p>
+                  </a:txBody>
+                </a:tc>
+                <a:tc>
+                  <a:txBody>
+                    <a:bodyPr/>
+                    <a:lstStyle/>
+                    <a:p>
+                      <a:pPr lvl="0" indent="0" marL="0" algn="r">
+                        <a:buNone/>
+                      </a:pPr>
+                      <a:r>
+                        <a:rPr/>
+                        <a:t>41</a:t>
+                      </a:r>
+                    </a:p>
+                  </a:txBody>
+                </a:tc>
+                <a:tc>
+                  <a:txBody>
+                    <a:bodyPr/>
+                    <a:lstStyle/>
+                    <a:p>
+                      <a:pPr lvl="0" indent="0" marL="0" algn="l">
+                        <a:buNone/>
+                      </a:pPr>
+                      <a:r>
+                        <a:rPr/>
+                        <a:t>5</a:t>
+                      </a:r>
+                    </a:p>
+                  </a:txBody>
+                </a:tc>
+                <a:tc>
+                  <a:txBody>
+                    <a:bodyPr/>
+                    <a:lstStyle/>
+                    <a:p>
+                      <a:pPr lvl="0" indent="0" marL="0" algn="l">
+                        <a:buNone/>
+                      </a:pPr>
+                      <a:r>
+                        <a:rPr/>
+                        <a:t>5</a:t>
+                      </a:r>
+                    </a:p>
+                  </a:txBody>
+                </a:tc>
+                <a:tc>
+                  <a:txBody>
+                    <a:bodyPr/>
+                    <a:lstStyle/>
+                    <a:p>
+                      <a:pPr lvl="0" indent="0" marL="0" algn="l">
+                        <a:buNone/>
+                      </a:pPr>
+                      <a:r>
+                        <a:rPr/>
+                        <a:t>7</a:t>
+                      </a:r>
+                    </a:p>
+                  </a:txBody>
+                </a:tc>
+                <a:tc>
+                  <a:txBody>
+                    <a:bodyPr/>
+                    <a:lstStyle/>
+                    <a:p>
+                      <a:pPr lvl="0" indent="0" marL="0" algn="r">
+                        <a:buNone/>
+                      </a:pPr>
+                      <a:r>
+                        <a:rPr/>
+                        <a:t>5</a:t>
+                      </a:r>
+                    </a:p>
+                  </a:txBody>
+                </a:tc>
+                <a:tc>
+                  <a:txBody>
+                    <a:bodyPr/>
+                    <a:lstStyle/>
+                    <a:p>
+                      <a:pPr lvl="0" indent="0" marL="0" algn="l">
+                        <a:buNone/>
+                      </a:pPr>
+                      <a:r>
+                        <a:rPr/>
+                        <a:t>F</a:t>
+                      </a:r>
+                    </a:p>
+                  </a:txBody>
+                </a:tc>
+                <a:tc>
+                  <a:txBody>
+                    <a:bodyPr/>
+                    <a:lstStyle/>
+                    <a:p>
+                      <a:pPr lvl="0" indent="0" marL="0" algn="r">
+                        <a:buNone/>
+                      </a:pPr>
+                      <a:r>
+                        <a:rPr/>
+                        <a:t>350</a:t>
+                      </a:r>
+                    </a:p>
+                  </a:txBody>
+                </a:tc>
+                <a:tc>
+                  <a:txBody>
+                    <a:bodyPr/>
+                    <a:lstStyle/>
+                    <a:p>
+                      <a:pPr lvl="0" indent="0" marL="0" algn="r">
+                        <a:buNone/>
+                      </a:pPr>
+                      <a:r>
+                        <a:rPr/>
+                        <a:t>0</a:t>
+                      </a:r>
+                    </a:p>
+                  </a:txBody>
+                </a:tc>
+                <a:tc>
+                  <a:txBody>
+                    <a:bodyPr/>
+                    <a:lstStyle/>
+                    <a:p>
+                      <a:pPr lvl="0" indent="0" marL="0" algn="l">
+                        <a:buNone/>
+                      </a:pPr>
+                      <a:r>
+                        <a:rPr/>
+                        <a:t>FALSE</a:t>
+                      </a:r>
+                    </a:p>
+                  </a:txBody>
+                </a:tc>
+              </a:tr>
+            </a:tbl>
+          </a:graphicData>
+        </a:graphic>
+      </p:graphicFrame>
+    </p:spTree>
+  </p:cSld>
+</p:sld>
+</file>
+
+<file path=ppt/slides/slide8.xml><?xml version="1.0" encoding="utf-8"?>
+<p:sld xmlns:a="http://schemas.openxmlformats.org/drawingml/2006/main" xmlns:r="http://schemas.openxmlformats.org/officeDocument/2006/relationships" xmlns:p="http://schemas.openxmlformats.org/presentationml/2006/main">
+  <p:cSld>
+    <p:spTree>
+      <p:nvGrpSpPr>
+        <p:cNvPr id="1" name=""/>
+        <p:cNvGrpSpPr/>
+        <p:nvPr/>
+      </p:nvGrpSpPr>
+      <p:grpSpPr>
+        <a:xfrm>
+          <a:off x="0" y="0"/>
+          <a:ext cx="0" cy="0"/>
+          <a:chOff x="0" y="0"/>
+          <a:chExt cx="0" cy="0"/>
+        </a:xfrm>
+      </p:grpSpPr>
+      <p:sp>
+        <p:nvSpPr>
+          <p:cNvPr id="2" name="Title 1"/>
+          <p:cNvSpPr>
+            <a:spLocks noGrp="1"/>
+          </p:cNvSpPr>
+          <p:nvPr>
+            <p:ph type="title"/>
+          </p:nvPr>
+        </p:nvSpPr>
+        <p:spPr/>
+        <p:txBody>
+          <a:bodyPr/>
+          <a:lstStyle/>
+          <a:p>
+            <a:pPr lvl="0" indent="0" marL="0">
+              <a:buNone/>
+            </a:pPr>
+            <a:r>
+              <a:rPr/>
+              <a:t>Data Characteristics</a:t>
+            </a:r>
+          </a:p>
+        </p:txBody>
+      </p:sp>
+      <p:sp>
+        <p:nvSpPr>
+          <p:cNvPr id="3" name="Content Placeholder 2"/>
+          <p:cNvSpPr>
+            <a:spLocks noGrp="1"/>
+          </p:cNvSpPr>
+          <p:nvPr>
+            <p:ph idx="1"/>
+          </p:nvPr>
+        </p:nvSpPr>
+        <p:spPr/>
+        <p:txBody>
+          <a:bodyPr/>
+          <a:lstStyle/>
+          <a:p>
+            <a:pPr lvl="0"/>
+            <a:r>
+              <a:rPr/>
+              <a:t>511 bridges total</a:t>
+            </a:r>
+          </a:p>
+          <a:p>
+            <a:pPr lvl="0"/>
+            <a:r>
+              <a:rPr/>
+              <a:t>Average age ~45 years</a:t>
+            </a:r>
+          </a:p>
+          <a:p>
+            <a:pPr lvl="0"/>
+            <a:r>
+              <a:rPr/>
+              <a:t>Only 16 bridges in poor condition (~3%)</a:t>
+            </a:r>
+          </a:p>
+          <a:p>
+            <a:pPr lvl="0" indent="0" marL="0">
+              <a:buNone/>
+            </a:pPr>
+            <a:r>
+              <a:rPr/>
+              <a:t>Most bridges are still in fair to good condition</a:t>
+            </a:r>
+          </a:p>
+        </p:txBody>
+      </p:sp>
+    </p:spTree>
+  </p:cSld>
+</p:sld>
+</file>
+
+<file path=ppt/slides/slide9.xml><?xml version="1.0" encoding="utf-8"?>
+<p:sld xmlns:a="http://schemas.openxmlformats.org/drawingml/2006/main" xmlns:r="http://schemas.openxmlformats.org/officeDocument/2006/relationships" xmlns:p="http://schemas.openxmlformats.org/presentationml/2006/main">
+  <p:cSld>
+    <p:spTree>
+      <p:nvGrpSpPr>
+        <p:cNvPr id="1" name=""/>
+        <p:cNvGrpSpPr/>
+        <p:nvPr/>
+      </p:nvGrpSpPr>
+      <p:grpSpPr>
+        <a:xfrm>
+          <a:off x="0" y="0"/>
+          <a:ext cx="0" cy="0"/>
+          <a:chOff x="0" y="0"/>
+          <a:chExt cx="0" cy="0"/>
+        </a:xfrm>
+      </p:grpSpPr>
+      <p:sp>
+        <p:nvSpPr>
+          <p:cNvPr id="2" name="Title 1"/>
+          <p:cNvSpPr>
+            <a:spLocks noGrp="1"/>
+          </p:cNvSpPr>
+          <p:nvPr>
+            <p:ph type="title"/>
+          </p:nvPr>
+        </p:nvSpPr>
+        <p:spPr/>
+        <p:txBody>
+          <a:bodyPr/>
+          <a:lstStyle/>
+          <a:p>
+            <a:pPr lvl="0" indent="0" marL="0">
+              <a:buNone/>
+            </a:pPr>
+            <a:r>
+              <a:rPr/>
+              <a:t>Bridge Condition Distribution</a:t>
             </a:r>
           </a:p>
         </p:txBody>
@@ -3509,9 +5944,7 @@
         <p:nvSpPr>
           <p:cNvPr id="1" name="TextBox 3"/>
           <p:cNvSpPr txBox="1"/>
-          <p:nvPr>
-            <p:ph idx="1"/>
-          </p:nvPr>
+          <p:nvPr/>
         </p:nvSpPr>
         <p:spPr>
           <a:xfrm>
@@ -3532,1001 +5965,7 @@
             </a:pPr>
             <a:r>
               <a:rPr/>
-              <a:t>Number of bridges in poor vs acceptable condition</a:t>
-            </a:r>
-          </a:p>
-        </p:txBody>
-      </p:sp>
-    </p:spTree>
-  </p:cSld>
-</p:sld>
-</file>
-
-<file path=ppt/slides/slide14.xml><?xml version="1.0" encoding="utf-8"?>
-<p:sld xmlns:a="http://schemas.openxmlformats.org/drawingml/2006/main" xmlns:r="http://schemas.openxmlformats.org/officeDocument/2006/relationships" xmlns:p="http://schemas.openxmlformats.org/presentationml/2006/main">
-  <p:cSld>
-    <p:spTree>
-      <p:nvGrpSpPr>
-        <p:cNvPr id="1" name=""/>
-        <p:cNvGrpSpPr/>
-        <p:nvPr/>
-      </p:nvGrpSpPr>
-      <p:grpSpPr>
-        <a:xfrm>
-          <a:off x="0" y="0"/>
-          <a:ext cx="0" cy="0"/>
-          <a:chOff x="0" y="0"/>
-          <a:chExt cx="0" cy="0"/>
-        </a:xfrm>
-      </p:grpSpPr>
-      <p:sp>
-        <p:nvSpPr>
-          <p:cNvPr id="2" name="Title 1"/>
-          <p:cNvSpPr>
-            <a:spLocks noGrp="1"/>
-          </p:cNvSpPr>
-          <p:nvPr>
-            <p:ph type="title"/>
-          </p:nvPr>
-        </p:nvSpPr>
-        <p:spPr/>
-        <p:txBody>
-          <a:bodyPr/>
-          <a:lstStyle/>
-          <a:p>
-            <a:pPr lvl="0" indent="0" marL="0">
-              <a:buNone/>
-            </a:pPr>
-            <a:r>
-              <a:rPr/>
-              <a:t>Recommendations</a:t>
-            </a:r>
-          </a:p>
-        </p:txBody>
-      </p:sp>
-      <p:sp>
-        <p:nvSpPr>
-          <p:cNvPr id="3" name="Content Placeholder 2"/>
-          <p:cNvSpPr>
-            <a:spLocks noGrp="1"/>
-          </p:cNvSpPr>
-          <p:nvPr>
-            <p:ph idx="1"/>
-          </p:nvPr>
-        </p:nvSpPr>
-        <p:spPr/>
-        <p:txBody>
-          <a:bodyPr/>
-          <a:lstStyle/>
-          <a:p>
-            <a:pPr lvl="0"/>
-            <a:r>
-              <a:rPr/>
-              <a:t>Monitor lower rated bridges more closely</a:t>
-            </a:r>
-          </a:p>
-          <a:p>
-            <a:pPr lvl="0"/>
-            <a:r>
-              <a:rPr/>
-              <a:t>Prioritize repairs</a:t>
-            </a:r>
-          </a:p>
-          <a:p>
-            <a:pPr lvl="0"/>
-            <a:r>
-              <a:rPr/>
-              <a:t>Continue inspections</a:t>
-            </a:r>
-          </a:p>
-          <a:p>
-            <a:pPr lvl="0"/>
-            <a:r>
-              <a:rPr/>
-              <a:t>Focus on high traffic bridges</a:t>
-            </a:r>
-          </a:p>
-        </p:txBody>
-      </p:sp>
-    </p:spTree>
-  </p:cSld>
-</p:sld>
-</file>
-
-<file path=ppt/slides/slide15.xml><?xml version="1.0" encoding="utf-8"?>
-<p:sld xmlns:a="http://schemas.openxmlformats.org/drawingml/2006/main" xmlns:r="http://schemas.openxmlformats.org/officeDocument/2006/relationships" xmlns:p="http://schemas.openxmlformats.org/presentationml/2006/main">
-  <p:cSld>
-    <p:spTree>
-      <p:nvGrpSpPr>
-        <p:cNvPr id="1" name=""/>
-        <p:cNvGrpSpPr/>
-        <p:nvPr/>
-      </p:nvGrpSpPr>
-      <p:grpSpPr>
-        <a:xfrm>
-          <a:off x="0" y="0"/>
-          <a:ext cx="0" cy="0"/>
-          <a:chOff x="0" y="0"/>
-          <a:chExt cx="0" cy="0"/>
-        </a:xfrm>
-      </p:grpSpPr>
-      <p:sp>
-        <p:nvSpPr>
-          <p:cNvPr id="2" name="Title 1"/>
-          <p:cNvSpPr>
-            <a:spLocks noGrp="1"/>
-          </p:cNvSpPr>
-          <p:nvPr>
-            <p:ph type="title"/>
-          </p:nvPr>
-        </p:nvSpPr>
-        <p:spPr/>
-        <p:txBody>
-          <a:bodyPr/>
-          <a:lstStyle/>
-          <a:p>
-            <a:pPr lvl="0" indent="0" marL="0">
-              <a:buNone/>
-            </a:pPr>
-            <a:r>
-              <a:rPr/>
-              <a:t>Final Takeaway</a:t>
-            </a:r>
-          </a:p>
-        </p:txBody>
-      </p:sp>
-      <p:sp>
-        <p:nvSpPr>
-          <p:cNvPr id="3" name="Content Placeholder 2"/>
-          <p:cNvSpPr>
-            <a:spLocks noGrp="1"/>
-          </p:cNvSpPr>
-          <p:nvPr>
-            <p:ph idx="1"/>
-          </p:nvPr>
-        </p:nvSpPr>
-        <p:spPr/>
-        <p:txBody>
-          <a:bodyPr/>
-          <a:lstStyle/>
-          <a:p>
-            <a:pPr lvl="0" indent="0" marL="0">
-              <a:buNone/>
-            </a:pPr>
-            <a:r>
-              <a:rPr/>
-              <a:t>Bridge collapse risk is low</a:t>
-            </a:r>
-          </a:p>
-          <a:p>
-            <a:pPr lvl="0" indent="0" marL="0">
-              <a:buNone/>
-            </a:pPr>
-            <a:r>
-              <a:rPr/>
-              <a:t>BUT</a:t>
-            </a:r>
-          </a:p>
-          <a:p>
-            <a:pPr lvl="0" indent="0" marL="0">
-              <a:buNone/>
-            </a:pPr>
-            <a:r>
-              <a:rPr/>
-              <a:t>Targeted maintenance is needed</a:t>
-            </a:r>
-          </a:p>
-        </p:txBody>
-      </p:sp>
-    </p:spTree>
-  </p:cSld>
-</p:sld>
-</file>
-
-<file path=ppt/slides/slide16.xml><?xml version="1.0" encoding="utf-8"?>
-<p:sld xmlns:a="http://schemas.openxmlformats.org/drawingml/2006/main" xmlns:r="http://schemas.openxmlformats.org/officeDocument/2006/relationships" xmlns:p="http://schemas.openxmlformats.org/presentationml/2006/main">
-  <p:cSld>
-    <p:spTree>
-      <p:nvGrpSpPr>
-        <p:cNvPr id="1" name=""/>
-        <p:cNvGrpSpPr/>
-        <p:nvPr/>
-      </p:nvGrpSpPr>
-      <p:grpSpPr>
-        <a:xfrm>
-          <a:off x="0" y="0"/>
-          <a:ext cx="0" cy="0"/>
-          <a:chOff x="0" y="0"/>
-          <a:chExt cx="0" cy="0"/>
-        </a:xfrm>
-      </p:grpSpPr>
-      <p:sp>
-        <p:nvSpPr>
-          <p:cNvPr id="2" name="Title 1"/>
-          <p:cNvSpPr>
-            <a:spLocks noGrp="1"/>
-          </p:cNvSpPr>
-          <p:nvPr>
-            <p:ph type="title"/>
-          </p:nvPr>
-        </p:nvSpPr>
-        <p:spPr/>
-        <p:txBody>
-          <a:bodyPr/>
-          <a:lstStyle/>
-          <a:p>
-            <a:pPr lvl="0" indent="0" marL="0">
-              <a:buNone/>
-            </a:pPr>
-            <a:r>
-              <a:rPr/>
-              <a:t>Thank You</a:t>
-            </a:r>
-          </a:p>
-        </p:txBody>
-      </p:sp>
-      <p:sp>
-        <p:nvSpPr>
-          <p:cNvPr id="3" name="Content Placeholder 2"/>
-          <p:cNvSpPr>
-            <a:spLocks noGrp="1"/>
-          </p:cNvSpPr>
-          <p:nvPr>
-            <p:ph idx="1"/>
-          </p:nvPr>
-        </p:nvSpPr>
-        <p:spPr/>
-        <p:txBody>
-          <a:bodyPr/>
-          <a:lstStyle/>
-          <a:p>
-            <a:pPr lvl="0" indent="0" marL="0">
-              <a:buNone/>
-            </a:pPr>
-            <a:r>
-              <a:rPr/>
-              <a:t>Questions?</a:t>
-            </a:r>
-          </a:p>
-        </p:txBody>
-      </p:sp>
-    </p:spTree>
-  </p:cSld>
-</p:sld>
-</file>
-
-<file path=ppt/slides/slide2.xml><?xml version="1.0" encoding="utf-8"?>
-<p:sld xmlns:a="http://schemas.openxmlformats.org/drawingml/2006/main" xmlns:r="http://schemas.openxmlformats.org/officeDocument/2006/relationships" xmlns:p="http://schemas.openxmlformats.org/presentationml/2006/main">
-  <p:cSld>
-    <p:spTree>
-      <p:nvGrpSpPr>
-        <p:cNvPr id="1" name=""/>
-        <p:cNvGrpSpPr/>
-        <p:nvPr/>
-      </p:nvGrpSpPr>
-      <p:grpSpPr>
-        <a:xfrm>
-          <a:off x="0" y="0"/>
-          <a:ext cx="0" cy="0"/>
-          <a:chOff x="0" y="0"/>
-          <a:chExt cx="0" cy="0"/>
-        </a:xfrm>
-      </p:grpSpPr>
-      <p:sp>
-        <p:nvSpPr>
-          <p:cNvPr id="2" name="Title 1"/>
-          <p:cNvSpPr>
-            <a:spLocks noGrp="1"/>
-          </p:cNvSpPr>
-          <p:nvPr>
-            <p:ph type="title"/>
-          </p:nvPr>
-        </p:nvSpPr>
-        <p:spPr/>
-        <p:txBody>
-          <a:bodyPr/>
-          <a:lstStyle/>
-          <a:p>
-            <a:pPr lvl="0" indent="0" marL="0">
-              <a:buNone/>
-            </a:pPr>
-            <a:r>
-              <a:rPr/>
-              <a:t>Why This Matters</a:t>
-            </a:r>
-          </a:p>
-        </p:txBody>
-      </p:sp>
-      <p:sp>
-        <p:nvSpPr>
-          <p:cNvPr id="3" name="Content Placeholder 2"/>
-          <p:cNvSpPr>
-            <a:spLocks noGrp="1"/>
-          </p:cNvSpPr>
-          <p:nvPr>
-            <p:ph idx="1"/>
-          </p:nvPr>
-        </p:nvSpPr>
-        <p:spPr/>
-        <p:txBody>
-          <a:bodyPr/>
-          <a:lstStyle/>
-          <a:p>
-            <a:pPr lvl="0"/>
-            <a:r>
-              <a:rPr/>
-              <a:t>Bridge failures have happened in the U.S.</a:t>
-            </a:r>
-          </a:p>
-          <a:p>
-            <a:pPr lvl="0"/>
-            <a:r>
-              <a:rPr/>
-              <a:t>Can cause serious safety issues</a:t>
-            </a:r>
-          </a:p>
-          <a:p>
-            <a:pPr lvl="0"/>
-            <a:r>
-              <a:rPr/>
-              <a:t>Can disrupt major traffic routes</a:t>
-            </a:r>
-          </a:p>
-        </p:txBody>
-      </p:sp>
-    </p:spTree>
-  </p:cSld>
-</p:sld>
-</file>
-
-<file path=ppt/slides/slide3.xml><?xml version="1.0" encoding="utf-8"?>
-<p:sld xmlns:a="http://schemas.openxmlformats.org/drawingml/2006/main" xmlns:r="http://schemas.openxmlformats.org/officeDocument/2006/relationships" xmlns:p="http://schemas.openxmlformats.org/presentationml/2006/main">
-  <p:cSld>
-    <p:spTree>
-      <p:nvGrpSpPr>
-        <p:cNvPr id="1" name=""/>
-        <p:cNvGrpSpPr/>
-        <p:nvPr/>
-      </p:nvGrpSpPr>
-      <p:grpSpPr>
-        <a:xfrm>
-          <a:off x="0" y="0"/>
-          <a:ext cx="0" cy="0"/>
-          <a:chOff x="0" y="0"/>
-          <a:chExt cx="0" cy="0"/>
-        </a:xfrm>
-      </p:grpSpPr>
-      <p:sp>
-        <p:nvSpPr>
-          <p:cNvPr id="2" name="Title 1"/>
-          <p:cNvSpPr>
-            <a:spLocks noGrp="1"/>
-          </p:cNvSpPr>
-          <p:nvPr>
-            <p:ph type="title"/>
-          </p:nvPr>
-        </p:nvSpPr>
-        <p:spPr/>
-        <p:txBody>
-          <a:bodyPr/>
-          <a:lstStyle/>
-          <a:p>
-            <a:pPr lvl="0" indent="0" marL="0">
-              <a:buNone/>
-            </a:pPr>
-            <a:r>
-              <a:rPr/>
-              <a:t>What I’ll Cover</a:t>
-            </a:r>
-          </a:p>
-        </p:txBody>
-      </p:sp>
-      <p:sp>
-        <p:nvSpPr>
-          <p:cNvPr id="3" name="Content Placeholder 2"/>
-          <p:cNvSpPr>
-            <a:spLocks noGrp="1"/>
-          </p:cNvSpPr>
-          <p:nvPr>
-            <p:ph idx="1"/>
-          </p:nvPr>
-        </p:nvSpPr>
-        <p:spPr/>
-        <p:txBody>
-          <a:bodyPr/>
-          <a:lstStyle/>
-          <a:p>
-            <a:pPr lvl="0"/>
-            <a:r>
-              <a:rPr/>
-              <a:t>Data used</a:t>
-            </a:r>
-          </a:p>
-          <a:p>
-            <a:pPr lvl="0"/>
-            <a:r>
-              <a:rPr/>
-              <a:t>How risk was calculated</a:t>
-            </a:r>
-          </a:p>
-          <a:p>
-            <a:pPr lvl="0"/>
-            <a:r>
-              <a:rPr/>
-              <a:t>Key findings</a:t>
-            </a:r>
-          </a:p>
-          <a:p>
-            <a:pPr lvl="0"/>
-            <a:r>
-              <a:rPr/>
-              <a:t>Recommendations</a:t>
-            </a:r>
-          </a:p>
-        </p:txBody>
-      </p:sp>
-    </p:spTree>
-  </p:cSld>
-</p:sld>
-</file>
-
-<file path=ppt/slides/slide4.xml><?xml version="1.0" encoding="utf-8"?>
-<p:sld xmlns:a="http://schemas.openxmlformats.org/drawingml/2006/main" xmlns:r="http://schemas.openxmlformats.org/officeDocument/2006/relationships" xmlns:p="http://schemas.openxmlformats.org/presentationml/2006/main">
-  <p:cSld>
-    <p:spTree>
-      <p:nvGrpSpPr>
-        <p:cNvPr id="1" name=""/>
-        <p:cNvGrpSpPr/>
-        <p:nvPr/>
-      </p:nvGrpSpPr>
-      <p:grpSpPr>
-        <a:xfrm>
-          <a:off x="0" y="0"/>
-          <a:ext cx="0" cy="0"/>
-          <a:chOff x="0" y="0"/>
-          <a:chExt cx="0" cy="0"/>
-        </a:xfrm>
-      </p:grpSpPr>
-      <p:sp>
-        <p:nvSpPr>
-          <p:cNvPr id="2" name="Title 1"/>
-          <p:cNvSpPr>
-            <a:spLocks noGrp="1"/>
-          </p:cNvSpPr>
-          <p:nvPr>
-            <p:ph type="title"/>
-          </p:nvPr>
-        </p:nvSpPr>
-        <p:spPr/>
-        <p:txBody>
-          <a:bodyPr/>
-          <a:lstStyle/>
-          <a:p>
-            <a:pPr lvl="0" indent="0" marL="0">
-              <a:buNone/>
-            </a:pPr>
-            <a:r>
-              <a:rPr/>
-              <a:t>Data Used</a:t>
-            </a:r>
-          </a:p>
-        </p:txBody>
-      </p:sp>
-      <p:sp>
-        <p:nvSpPr>
-          <p:cNvPr id="3" name="Content Placeholder 2"/>
-          <p:cNvSpPr>
-            <a:spLocks noGrp="1"/>
-          </p:cNvSpPr>
-          <p:nvPr>
-            <p:ph idx="1"/>
-          </p:nvPr>
-        </p:nvSpPr>
-        <p:spPr/>
-        <p:txBody>
-          <a:bodyPr/>
-          <a:lstStyle/>
-          <a:p>
-            <a:pPr lvl="0"/>
-            <a:r>
-              <a:rPr/>
-              <a:t>National Bridge Inventory (main dataset)</a:t>
-            </a:r>
-          </a:p>
-          <a:p>
-            <a:pPr lvl="0"/>
-            <a:r>
-              <a:rPr/>
-              <a:t>Traffic data (ADT)</a:t>
-            </a:r>
-          </a:p>
-          <a:p>
-            <a:pPr lvl="0"/>
-            <a:r>
-              <a:rPr/>
-              <a:t>NDOT (context only)</a:t>
-            </a:r>
-          </a:p>
-          <a:p>
-            <a:pPr lvl="0"/>
-            <a:r>
-              <a:rPr/>
-              <a:t>511 bridges analyzed</a:t>
-            </a:r>
-          </a:p>
-        </p:txBody>
-      </p:sp>
-    </p:spTree>
-  </p:cSld>
-</p:sld>
-</file>
-
-<file path=ppt/slides/slide5.xml><?xml version="1.0" encoding="utf-8"?>
-<p:sld xmlns:a="http://schemas.openxmlformats.org/drawingml/2006/main" xmlns:r="http://schemas.openxmlformats.org/officeDocument/2006/relationships" xmlns:p="http://schemas.openxmlformats.org/presentationml/2006/main">
-  <p:cSld>
-    <p:spTree>
-      <p:nvGrpSpPr>
-        <p:cNvPr id="1" name=""/>
-        <p:cNvGrpSpPr/>
-        <p:nvPr/>
-      </p:nvGrpSpPr>
-      <p:grpSpPr>
-        <a:xfrm>
-          <a:off x="0" y="0"/>
-          <a:ext cx="0" cy="0"/>
-          <a:chOff x="0" y="0"/>
-          <a:chExt cx="0" cy="0"/>
-        </a:xfrm>
-      </p:grpSpPr>
-      <p:sp>
-        <p:nvSpPr>
-          <p:cNvPr id="2" name="Title 1"/>
-          <p:cNvSpPr>
-            <a:spLocks noGrp="1"/>
-          </p:cNvSpPr>
-          <p:nvPr>
-            <p:ph type="title"/>
-          </p:nvPr>
-        </p:nvSpPr>
-        <p:spPr/>
-        <p:txBody>
-          <a:bodyPr/>
-          <a:lstStyle/>
-          <a:p>
-            <a:pPr lvl="0" indent="0" marL="0">
-              <a:buNone/>
-            </a:pPr>
-            <a:r>
-              <a:rPr/>
-              <a:t>Key Variables</a:t>
-            </a:r>
-          </a:p>
-        </p:txBody>
-      </p:sp>
-      <p:sp>
-        <p:nvSpPr>
-          <p:cNvPr id="3" name="Content Placeholder 2"/>
-          <p:cNvSpPr>
-            <a:spLocks noGrp="1"/>
-          </p:cNvSpPr>
-          <p:nvPr>
-            <p:ph idx="1"/>
-          </p:nvPr>
-        </p:nvSpPr>
-        <p:spPr/>
-        <p:txBody>
-          <a:bodyPr/>
-          <a:lstStyle/>
-          <a:p>
-            <a:pPr lvl="0"/>
-            <a:r>
-              <a:rPr/>
-              <a:t>Bridge age</a:t>
-            </a:r>
-          </a:p>
-          <a:p>
-            <a:pPr lvl="0"/>
-            <a:r>
-              <a:rPr/>
-              <a:t>Condition ratings (0–9 scale)</a:t>
-            </a:r>
-          </a:p>
-          <a:p>
-            <a:pPr lvl="0"/>
-            <a:r>
-              <a:rPr/>
-              <a:t>Lowest condition rating</a:t>
-            </a:r>
-          </a:p>
-          <a:p>
-            <a:pPr lvl="0"/>
-            <a:r>
-              <a:rPr/>
-              <a:t>Traffic (vehicles per day)</a:t>
-            </a:r>
-          </a:p>
-          <a:p>
-            <a:pPr lvl="0"/>
-            <a:r>
-              <a:rPr/>
-              <a:t>Poor condition = rating ≤ 4</a:t>
-            </a:r>
-          </a:p>
-        </p:txBody>
-      </p:sp>
-    </p:spTree>
-  </p:cSld>
-</p:sld>
-</file>
-
-<file path=ppt/slides/slide6.xml><?xml version="1.0" encoding="utf-8"?>
-<p:sld xmlns:a="http://schemas.openxmlformats.org/drawingml/2006/main" xmlns:r="http://schemas.openxmlformats.org/officeDocument/2006/relationships" xmlns:p="http://schemas.openxmlformats.org/presentationml/2006/main">
-  <p:cSld>
-    <p:spTree>
-      <p:nvGrpSpPr>
-        <p:cNvPr id="1" name=""/>
-        <p:cNvGrpSpPr/>
-        <p:nvPr/>
-      </p:nvGrpSpPr>
-      <p:grpSpPr>
-        <a:xfrm>
-          <a:off x="0" y="0"/>
-          <a:ext cx="0" cy="0"/>
-          <a:chOff x="0" y="0"/>
-          <a:chExt cx="0" cy="0"/>
-        </a:xfrm>
-      </p:grpSpPr>
-      <p:sp>
-        <p:nvSpPr>
-          <p:cNvPr id="2" name="Title 1"/>
-          <p:cNvSpPr>
-            <a:spLocks noGrp="1"/>
-          </p:cNvSpPr>
-          <p:nvPr>
-            <p:ph type="title"/>
-          </p:nvPr>
-        </p:nvSpPr>
-        <p:spPr/>
-        <p:txBody>
-          <a:bodyPr/>
-          <a:lstStyle/>
-          <a:p>
-            <a:pPr lvl="0" indent="0" marL="0">
-              <a:buNone/>
-            </a:pPr>
-            <a:r>
-              <a:rPr/>
-              <a:t>Methods</a:t>
-            </a:r>
-          </a:p>
-        </p:txBody>
-      </p:sp>
-      <p:sp>
-        <p:nvSpPr>
-          <p:cNvPr id="3" name="Content Placeholder 2"/>
-          <p:cNvSpPr>
-            <a:spLocks noGrp="1"/>
-          </p:cNvSpPr>
-          <p:nvPr>
-            <p:ph idx="1"/>
-          </p:nvPr>
-        </p:nvSpPr>
-        <p:spPr/>
-        <p:txBody>
-          <a:bodyPr/>
-          <a:lstStyle/>
-          <a:p>
-            <a:pPr lvl="0"/>
-            <a:r>
-              <a:rPr/>
-              <a:t>Filtered to Omaha (Douglas County)</a:t>
-            </a:r>
-          </a:p>
-          <a:p>
-            <a:pPr lvl="0"/>
-            <a:r>
-              <a:rPr/>
-              <a:t>Removed missing data</a:t>
-            </a:r>
-          </a:p>
-          <a:p>
-            <a:pPr lvl="0"/>
-            <a:r>
-              <a:rPr/>
-              <a:t>Calculated bridge age</a:t>
-            </a:r>
-          </a:p>
-          <a:p>
-            <a:pPr lvl="0"/>
-            <a:r>
-              <a:rPr/>
-              <a:t>Identified poor bridges</a:t>
-            </a:r>
-          </a:p>
-          <a:p>
-            <a:pPr lvl="0" indent="0" marL="0">
-              <a:buNone/>
-            </a:pPr>
-            <a:r>
-              <a:rPr b="1"/>
-              <a:t>Risk = Probability × Consequence</a:t>
-            </a:r>
-          </a:p>
-        </p:txBody>
-      </p:sp>
-    </p:spTree>
-  </p:cSld>
-</p:sld>
-</file>
-
-<file path=ppt/slides/slide7.xml><?xml version="1.0" encoding="utf-8"?>
-<p:sld xmlns:a="http://schemas.openxmlformats.org/drawingml/2006/main" xmlns:r="http://schemas.openxmlformats.org/officeDocument/2006/relationships" xmlns:p="http://schemas.openxmlformats.org/presentationml/2006/main">
-  <p:cSld>
-    <p:spTree>
-      <p:nvGrpSpPr>
-        <p:cNvPr id="1" name=""/>
-        <p:cNvGrpSpPr/>
-        <p:nvPr/>
-      </p:nvGrpSpPr>
-      <p:grpSpPr>
-        <a:xfrm>
-          <a:off x="0" y="0"/>
-          <a:ext cx="0" cy="0"/>
-          <a:chOff x="0" y="0"/>
-          <a:chExt cx="0" cy="0"/>
-        </a:xfrm>
-      </p:grpSpPr>
-      <p:sp>
-        <p:nvSpPr>
-          <p:cNvPr id="2" name="Title 1"/>
-          <p:cNvSpPr>
-            <a:spLocks noGrp="1"/>
-          </p:cNvSpPr>
-          <p:nvPr>
-            <p:ph type="title"/>
-          </p:nvPr>
-        </p:nvSpPr>
-        <p:spPr/>
-        <p:txBody>
-          <a:bodyPr/>
-          <a:lstStyle/>
-          <a:p>
-            <a:pPr lvl="0" indent="0" marL="0">
-              <a:buNone/>
-            </a:pPr>
-            <a:r>
-              <a:rPr/>
-              <a:t>Data Characteristics</a:t>
-            </a:r>
-          </a:p>
-        </p:txBody>
-      </p:sp>
-      <p:sp>
-        <p:nvSpPr>
-          <p:cNvPr id="3" name="Content Placeholder 2"/>
-          <p:cNvSpPr>
-            <a:spLocks noGrp="1"/>
-          </p:cNvSpPr>
-          <p:nvPr>
-            <p:ph idx="1"/>
-          </p:nvPr>
-        </p:nvSpPr>
-        <p:spPr/>
-        <p:txBody>
-          <a:bodyPr/>
-          <a:lstStyle/>
-          <a:p>
-            <a:pPr lvl="0"/>
-            <a:r>
-              <a:rPr/>
-              <a:t>511 bridges total</a:t>
-            </a:r>
-          </a:p>
-          <a:p>
-            <a:pPr lvl="0"/>
-            <a:r>
-              <a:rPr/>
-              <a:t>Average age ~45 years</a:t>
-            </a:r>
-          </a:p>
-          <a:p>
-            <a:pPr lvl="0"/>
-            <a:r>
-              <a:rPr/>
-              <a:t>Only 16 bridges in poor condition (~3%)</a:t>
-            </a:r>
-          </a:p>
-        </p:txBody>
-      </p:sp>
-    </p:spTree>
-  </p:cSld>
-</p:sld>
-</file>
-
-<file path=ppt/slides/slide8.xml><?xml version="1.0" encoding="utf-8"?>
-<p:sld xmlns:a="http://schemas.openxmlformats.org/drawingml/2006/main" xmlns:r="http://schemas.openxmlformats.org/officeDocument/2006/relationships" xmlns:p="http://schemas.openxmlformats.org/presentationml/2006/main">
-  <p:cSld>
-    <p:spTree>
-      <p:nvGrpSpPr>
-        <p:cNvPr id="1" name=""/>
-        <p:cNvGrpSpPr/>
-        <p:nvPr/>
-      </p:nvGrpSpPr>
-      <p:grpSpPr>
-        <a:xfrm>
-          <a:off x="0" y="0"/>
-          <a:ext cx="0" cy="0"/>
-          <a:chOff x="0" y="0"/>
-          <a:chExt cx="0" cy="0"/>
-        </a:xfrm>
-      </p:grpSpPr>
-      <p:sp>
-        <p:nvSpPr>
-          <p:cNvPr id="2" name="Title 1"/>
-          <p:cNvSpPr>
-            <a:spLocks noGrp="1"/>
-          </p:cNvSpPr>
-          <p:nvPr>
-            <p:ph type="title"/>
-          </p:nvPr>
-        </p:nvSpPr>
-        <p:spPr/>
-        <p:txBody>
-          <a:bodyPr/>
-          <a:lstStyle/>
-          <a:p>
-            <a:pPr lvl="0" indent="0" marL="0">
-              <a:buNone/>
-            </a:pPr>
-            <a:r>
-              <a:rPr/>
-              <a:t>Bridge Condition Distribution</a:t>
-            </a:r>
-          </a:p>
-        </p:txBody>
-      </p:sp>
-      <p:pic>
-        <p:nvPicPr>
-          <p:cNvPr descr="slides_files/figure-pptx/unnamed-chunk-2-1.png" id="0" name="Picture 1"/>
-          <p:cNvPicPr>
-            <a:picLocks noGrp="1" noChangeAspect="1"/>
-          </p:cNvPicPr>
-          <p:nvPr/>
-        </p:nvPicPr>
-        <p:blipFill>
-          <a:blip r:embed="rId2"/>
-          <a:stretch>
-            <a:fillRect/>
-          </a:stretch>
-        </p:blipFill>
-        <p:spPr bwMode="auto">
-          <a:xfrm>
-            <a:off x="1689100" y="1193800"/>
-            <a:ext cx="5765800" cy="2882900"/>
-          </a:xfrm>
-          <a:prstGeom prst="rect">
-            <a:avLst/>
-          </a:prstGeom>
-          <a:noFill/>
-          <a:ln w="9525">
-            <a:noFill/>
-            <a:headEnd/>
-            <a:tailEnd/>
-          </a:ln>
-        </p:spPr>
-      </p:pic>
-      <p:sp>
-        <p:nvSpPr>
-          <p:cNvPr id="1" name="TextBox 3"/>
-          <p:cNvSpPr txBox="1"/>
-          <p:nvPr>
-            <p:ph idx="1"/>
-          </p:nvPr>
-        </p:nvSpPr>
-        <p:spPr>
-          <a:xfrm>
-            <a:off x="457200" y="4076700"/>
-            <a:ext cx="8229600" cy="508000"/>
-          </a:xfrm>
-          <a:prstGeom prst="rect">
-            <a:avLst/>
-          </a:prstGeom>
-          <a:noFill/>
-        </p:spPr>
-        <p:txBody>
-          <a:bodyPr/>
-          <a:lstStyle/>
-          <a:p>
-            <a:pPr lvl="0" indent="0" marL="0" algn="ctr">
-              <a:buNone/>
-            </a:pPr>
-            <a:r>
-              <a:rPr/>
               <a:t>Distribution of bridge condition ratings in Omaha.</a:t>
-            </a:r>
-          </a:p>
-        </p:txBody>
-      </p:sp>
-    </p:spTree>
-  </p:cSld>
-</p:sld>
-</file>
-
-<file path=ppt/slides/slide9.xml><?xml version="1.0" encoding="utf-8"?>
-<p:sld xmlns:a="http://schemas.openxmlformats.org/drawingml/2006/main" xmlns:r="http://schemas.openxmlformats.org/officeDocument/2006/relationships" xmlns:p="http://schemas.openxmlformats.org/presentationml/2006/main">
-  <p:cSld>
-    <p:spTree>
-      <p:nvGrpSpPr>
-        <p:cNvPr id="1" name=""/>
-        <p:cNvGrpSpPr/>
-        <p:nvPr/>
-      </p:nvGrpSpPr>
-      <p:grpSpPr>
-        <a:xfrm>
-          <a:off x="0" y="0"/>
-          <a:ext cx="0" cy="0"/>
-          <a:chOff x="0" y="0"/>
-          <a:chExt cx="0" cy="0"/>
-        </a:xfrm>
-      </p:grpSpPr>
-      <p:sp>
-        <p:nvSpPr>
-          <p:cNvPr id="2" name="Title 1"/>
-          <p:cNvSpPr>
-            <a:spLocks noGrp="1"/>
-          </p:cNvSpPr>
-          <p:nvPr>
-            <p:ph type="title"/>
-          </p:nvPr>
-        </p:nvSpPr>
-        <p:spPr/>
-        <p:txBody>
-          <a:bodyPr/>
-          <a:lstStyle/>
-          <a:p>
-            <a:pPr lvl="0" indent="0" marL="0">
-              <a:buNone/>
-            </a:pPr>
-            <a:r>
-              <a:rPr/>
-              <a:t>Probability of Failure</a:t>
-            </a:r>
-          </a:p>
-        </p:txBody>
-      </p:sp>
-      <p:sp>
-        <p:nvSpPr>
-          <p:cNvPr id="3" name="Content Placeholder 2"/>
-          <p:cNvSpPr>
-            <a:spLocks noGrp="1"/>
-          </p:cNvSpPr>
-          <p:nvPr>
-            <p:ph idx="1"/>
-          </p:nvPr>
-        </p:nvSpPr>
-        <p:spPr/>
-        <p:txBody>
-          <a:bodyPr/>
-          <a:lstStyle/>
-          <a:p>
-            <a:pPr lvl="0"/>
-            <a:r>
-              <a:rPr/>
-              <a:t>Lower condition rating = higher risk</a:t>
-            </a:r>
-          </a:p>
-          <a:p>
-            <a:pPr lvl="0"/>
-            <a:r>
-              <a:rPr/>
-              <a:t>Older bridges tend to have lower ratings</a:t>
-            </a:r>
-          </a:p>
-          <a:p>
-            <a:pPr lvl="0"/>
-            <a:r>
-              <a:rPr/>
-              <a:t>Most bridges are still in acceptable condition</a:t>
             </a:r>
           </a:p>
         </p:txBody>
